--- a/slides/Toan10/Slide_TOAN10_Bai3_T10-11.pptx
+++ b/slides/Toan10/Slide_TOAN10_Bai3_T10-11.pptx
@@ -3430,7 +3430,7 @@
         <p:spPr>
           <a:xfrm>
             <a:off x="731520" y="274320"/>
-            <a:ext cx="10972800" cy="868680"/>
+            <a:ext cx="9610344" cy="868680"/>
           </a:xfrm>
           <a:prstGeom prst="rect">
             <a:avLst/>
@@ -3450,7 +3450,7 @@
                 </a:solidFill>
                 <a:latin typeface="Arial"/>
               </a:rPr>
-              <a:t>CHÚ Ý: KỂ BỜ, KHÔNG KỂ BỜ</a:t>
+              <a:t>VÍ DỤ 3</a:t>
             </a:r>
           </a:p>
         </p:txBody>
@@ -3529,7 +3529,7 @@
                 </a:solidFill>
                 <a:latin typeface="Calibri"/>
               </a:rPr>
-              <a:t>Toán 10 · Bài 3. Bất phương trình bậc nhất hai ẩn          13</a:t>
+              <a:t>Toán 10 · Bài 3. Bất phương trình bậc nhất hai ẩn          10</a:t>
             </a:r>
           </a:p>
         </p:txBody>
@@ -3543,7 +3543,7 @@
         <p:spPr>
           <a:xfrm>
             <a:off x="731520" y="1508760"/>
-            <a:ext cx="10789920" cy="1700784"/>
+            <a:ext cx="6400800" cy="2267712"/>
           </a:xfrm>
           <a:prstGeom prst="rect">
             <a:avLst/>
@@ -3555,6 +3555,22 @@
             <a:spAutoFit/>
           </a:bodyPr>
           <a:lstStyle/>
+          <a:p>
+            <a:pPr algn="l">
+              <a:spcAft>
+                <a:spcPts val="1000"/>
+              </a:spcAft>
+            </a:pPr>
+            <a:r>
+              <a:rPr sz="2400" b="1">
+                <a:solidFill>
+                  <a:srgbClr val="1E40AF"/>
+                </a:solidFill>
+                <a:latin typeface="Calibri"/>
+              </a:rPr>
+              <a:t>Biểu diễn miền nghiệm: x + y ≥ 100</a:t>
+            </a:r>
+          </a:p>
           <a:p>
             <a:pPr algn="l" marL="365760" indent="-365760">
               <a:spcAft>
@@ -3573,7 +3589,7 @@
                 </a:solidFill>
                 <a:latin typeface="Calibri"/>
               </a:rPr>
-              <a:t>Luyện tập 2: biểu diễn miền nghiệm</a:t>
+              <a:t>d: x + y = 100, nét liền</a:t>
             </a:r>
           </a:p>
           <a:p>
@@ -3594,23 +3610,192 @@
                 </a:solidFill>
                 <a:latin typeface="Calibri"/>
               </a:rPr>
-              <a:t>2x + y &lt; 200</a:t>
-            </a:r>
-          </a:p>
-          <a:p>
-            <a:pPr algn="l">
+              <a:t>Thử O(0; 0): 0 ≥ 100 sai</a:t>
+            </a:r>
+          </a:p>
+          <a:p>
+            <a:pPr algn="l" marL="365760" indent="-365760">
               <a:spcAft>
                 <a:spcPts val="1000"/>
               </a:spcAft>
+              <a:buClr>
+                <a:srgbClr val="1E40AF"/>
+              </a:buClr>
+              <a:buFont typeface="Arial"/>
+              <a:buChar char="•"/>
             </a:pPr>
             <a:r>
+              <a:rPr sz="2400">
+                <a:solidFill>
+                  <a:srgbClr val="1E293B"/>
+                </a:solidFill>
+                <a:latin typeface="Calibri"/>
+              </a:rPr>
+              <a:t>Gạch bỏ nửa chứa O</a:t>
+            </a:r>
+          </a:p>
+        </p:txBody>
+      </p:sp>
+      <p:sp>
+        <p:nvSpPr>
+          <p:cNvPr id="7" name="Rounded Rectangle 6"/>
+          <p:cNvSpPr/>
+          <p:nvPr/>
+        </p:nvSpPr>
+        <p:spPr>
+          <a:xfrm>
+            <a:off x="731520" y="3913632"/>
+            <a:ext cx="6400800" cy="685800"/>
+          </a:xfrm>
+          <a:prstGeom prst="roundRect">
+            <a:avLst>
+              <a:gd name="adj" fmla="val 8000"/>
+            </a:avLst>
+          </a:prstGeom>
+          <a:solidFill>
+            <a:srgbClr val="FEF2F2"/>
+          </a:solidFill>
+          <a:ln w="19050">
+            <a:solidFill>
+              <a:srgbClr val="991B1B"/>
+            </a:solidFill>
+          </a:ln>
+          <a:effectLst/>
+        </p:spPr>
+        <p:style>
+          <a:lnRef idx="1">
+            <a:schemeClr val="accent1"/>
+          </a:lnRef>
+          <a:fillRef idx="3">
+            <a:schemeClr val="accent1"/>
+          </a:fillRef>
+          <a:effectRef idx="2">
+            <a:schemeClr val="accent1"/>
+          </a:effectRef>
+          <a:fontRef idx="minor">
+            <a:schemeClr val="lt1"/>
+          </a:fontRef>
+        </p:style>
+        <p:txBody>
+          <a:bodyPr rtlCol="0" anchor="ctr"/>
+          <a:lstStyle/>
+          <a:p>
+            <a:pPr algn="ctr"/>
+          </a:p>
+        </p:txBody>
+      </p:sp>
+      <p:sp>
+        <p:nvSpPr>
+          <p:cNvPr id="8" name="TextBox 7"/>
+          <p:cNvSpPr txBox="1"/>
+          <p:nvPr/>
+        </p:nvSpPr>
+        <p:spPr>
+          <a:xfrm>
+            <a:off x="914400" y="3913632"/>
+            <a:ext cx="6035040" cy="685800"/>
+          </a:xfrm>
+          <a:prstGeom prst="rect">
+            <a:avLst/>
+          </a:prstGeom>
+          <a:noFill/>
+        </p:spPr>
+        <p:txBody>
+          <a:bodyPr wrap="square" anchor="ctr">
+            <a:spAutoFit/>
+          </a:bodyPr>
+          <a:lstStyle/>
+          <a:p>
+            <a:pPr algn="l">
+              <a:spcAft>
+                <a:spcPts val="400"/>
+              </a:spcAft>
+            </a:pPr>
+            <a:r>
               <a:rPr sz="2400" b="1">
                 <a:solidFill>
-                  <a:srgbClr val="1E40AF"/>
-                </a:solidFill>
-                <a:latin typeface="Calibri"/>
-              </a:rPr>
-              <a:t>Gợi mở: Bờ d: nét liền hay nét đứt?</a:t>
+                  <a:srgbClr val="991B1B"/>
+                </a:solidFill>
+                <a:latin typeface="Calibri"/>
+              </a:rPr>
+              <a:t>Miền nghiệm: nửa không chứa O</a:t>
+            </a:r>
+          </a:p>
+        </p:txBody>
+      </p:sp>
+      <p:pic>
+        <p:nvPicPr>
+          <p:cNvPr id="9" name="Picture 8" descr="rId12.png"/>
+          <p:cNvPicPr>
+            <a:picLocks noChangeAspect="1"/>
+          </p:cNvPicPr>
+          <p:nvPr/>
+        </p:nvPicPr>
+        <p:blipFill>
+          <a:blip r:embed="rId2"/>
+          <a:stretch>
+            <a:fillRect/>
+          </a:stretch>
+        </p:blipFill>
+        <p:spPr>
+          <a:xfrm>
+            <a:off x="7406640" y="1631158"/>
+            <a:ext cx="4389120" cy="4372923"/>
+          </a:xfrm>
+          <a:prstGeom prst="rect">
+            <a:avLst/>
+          </a:prstGeom>
+        </p:spPr>
+      </p:pic>
+      <p:sp>
+        <p:nvSpPr>
+          <p:cNvPr id="10" name="Rounded Rectangle 9"/>
+          <p:cNvSpPr/>
+          <p:nvPr/>
+        </p:nvSpPr>
+        <p:spPr>
+          <a:xfrm>
+            <a:off x="10463479" y="457200"/>
+            <a:ext cx="1179576" cy="457200"/>
+          </a:xfrm>
+          <a:prstGeom prst="roundRect">
+            <a:avLst/>
+          </a:prstGeom>
+          <a:solidFill>
+            <a:srgbClr val="166534"/>
+          </a:solidFill>
+          <a:ln>
+            <a:noFill/>
+          </a:ln>
+          <a:effectLst/>
+        </p:spPr>
+        <p:style>
+          <a:lnRef idx="1">
+            <a:schemeClr val="accent1"/>
+          </a:lnRef>
+          <a:fillRef idx="3">
+            <a:schemeClr val="accent1"/>
+          </a:fillRef>
+          <a:effectRef idx="2">
+            <a:schemeClr val="accent1"/>
+          </a:effectRef>
+          <a:fontRef idx="minor">
+            <a:schemeClr val="lt1"/>
+          </a:fontRef>
+        </p:style>
+        <p:txBody>
+          <a:bodyPr rtlCol="0" anchor="ctr" tIns="0" bIns="0"/>
+          <a:lstStyle/>
+          <a:p>
+            <a:pPr algn="ctr"/>
+            <a:r>
+              <a:rPr sz="1400" b="1">
+                <a:solidFill>
+                  <a:srgbClr val="FFFFFF"/>
+                </a:solidFill>
+                <a:latin typeface="Arial"/>
+              </a:rPr>
+              <a:t>LỜI GIẢI</a:t>
             </a:r>
           </a:p>
         </p:txBody>
@@ -3694,7 +3879,7 @@
         <p:spPr>
           <a:xfrm>
             <a:off x="731520" y="274320"/>
-            <a:ext cx="10972800" cy="868680"/>
+            <a:ext cx="9848088" cy="868680"/>
           </a:xfrm>
           <a:prstGeom prst="rect">
             <a:avLst/>
@@ -3714,7 +3899,7 @@
                 </a:solidFill>
                 <a:latin typeface="Arial"/>
               </a:rPr>
-              <a:t>GIẢI BÀI TOÁN MỞ ĐẦU</a:t>
+              <a:t>VÍ DỤ 4</a:t>
             </a:r>
           </a:p>
         </p:txBody>
@@ -3793,7 +3978,7 @@
                 </a:solidFill>
                 <a:latin typeface="Calibri"/>
               </a:rPr>
-              <a:t>Toán 10 · Bài 3. Bất phương trình bậc nhất hai ẩn          15</a:t>
+              <a:t>Toán 10 · Bài 3. Bất phương trình bậc nhất hai ẩn          11</a:t>
             </a:r>
           </a:p>
         </p:txBody>
@@ -3807,7 +3992,7 @@
         <p:spPr>
           <a:xfrm>
             <a:off x="731520" y="1508760"/>
-            <a:ext cx="10789920" cy="2834640"/>
+            <a:ext cx="10789920" cy="1700784"/>
           </a:xfrm>
           <a:prstGeom prst="rect">
             <a:avLst/>
@@ -3837,7 +4022,7 @@
                 </a:solidFill>
                 <a:latin typeface="Calibri"/>
               </a:rPr>
-              <a:t>Vé loại 1: 50 000 đồng</a:t>
+              <a:t>Biểu diễn miền nghiệm:</a:t>
             </a:r>
           </a:p>
           <a:p>
@@ -3858,49 +4043,7 @@
                 </a:solidFill>
                 <a:latin typeface="Calibri"/>
               </a:rPr>
-              <a:t>Vé loại 2: 100 000 đồng</a:t>
-            </a:r>
-          </a:p>
-          <a:p>
-            <a:pPr algn="l" marL="365760" indent="-365760">
-              <a:spcAft>
-                <a:spcPts val="1000"/>
-              </a:spcAft>
-              <a:buClr>
-                <a:srgbClr val="1E40AF"/>
-              </a:buClr>
-              <a:buFont typeface="Arial"/>
-              <a:buChar char="•"/>
-            </a:pPr>
-            <a:r>
-              <a:rPr sz="2400">
-                <a:solidFill>
-                  <a:srgbClr val="1E293B"/>
-                </a:solidFill>
-                <a:latin typeface="Calibri"/>
-              </a:rPr>
-              <a:t>Bù lỗ khi thu dưới 20 triệu đồng</a:t>
-            </a:r>
-          </a:p>
-          <a:p>
-            <a:pPr algn="l" marL="365760" indent="-365760">
-              <a:spcAft>
-                <a:spcPts val="1000"/>
-              </a:spcAft>
-              <a:buClr>
-                <a:srgbClr val="1E40AF"/>
-              </a:buClr>
-              <a:buFont typeface="Arial"/>
-              <a:buChar char="•"/>
-            </a:pPr>
-            <a:r>
-              <a:rPr sz="2400">
-                <a:solidFill>
-                  <a:srgbClr val="1E293B"/>
-                </a:solidFill>
-                <a:latin typeface="Calibri"/>
-              </a:rPr>
-              <a:t>Bán thế nào thì rạp bù lỗ?</a:t>
+              <a:t>5x − 7y ≤ 0</a:t>
             </a:r>
           </a:p>
           <a:p>
@@ -3916,7 +4059,60 @@
                 </a:solidFill>
                 <a:latin typeface="Calibri"/>
               </a:rPr>
-              <a:t>Gợi mở: Lập BPT, vẽ miền nghiệm</a:t>
+              <a:t>Gợi mở: O có nằm trên d không?</a:t>
+            </a:r>
+          </a:p>
+        </p:txBody>
+      </p:sp>
+      <p:sp>
+        <p:nvSpPr>
+          <p:cNvPr id="7" name="Rounded Rectangle 6"/>
+          <p:cNvSpPr/>
+          <p:nvPr/>
+        </p:nvSpPr>
+        <p:spPr>
+          <a:xfrm>
+            <a:off x="10701223" y="457200"/>
+            <a:ext cx="941832" cy="457200"/>
+          </a:xfrm>
+          <a:prstGeom prst="roundRect">
+            <a:avLst/>
+          </a:prstGeom>
+          <a:solidFill>
+            <a:srgbClr val="1E40AF"/>
+          </a:solidFill>
+          <a:ln>
+            <a:noFill/>
+          </a:ln>
+          <a:effectLst/>
+        </p:spPr>
+        <p:style>
+          <a:lnRef idx="1">
+            <a:schemeClr val="accent1"/>
+          </a:lnRef>
+          <a:fillRef idx="3">
+            <a:schemeClr val="accent1"/>
+          </a:fillRef>
+          <a:effectRef idx="2">
+            <a:schemeClr val="accent1"/>
+          </a:effectRef>
+          <a:fontRef idx="minor">
+            <a:schemeClr val="lt1"/>
+          </a:fontRef>
+        </p:style>
+        <p:txBody>
+          <a:bodyPr rtlCol="0" anchor="ctr" tIns="0" bIns="0"/>
+          <a:lstStyle/>
+          <a:p>
+            <a:pPr algn="ctr"/>
+            <a:r>
+              <a:rPr sz="1400" b="1">
+                <a:solidFill>
+                  <a:srgbClr val="FFFFFF"/>
+                </a:solidFill>
+                <a:latin typeface="Arial"/>
+              </a:rPr>
+              <a:t>ĐỀ BÀI</a:t>
             </a:r>
           </a:p>
         </p:txBody>
@@ -4000,7 +4196,7 @@
         <p:spPr>
           <a:xfrm>
             <a:off x="731520" y="274320"/>
-            <a:ext cx="10972800" cy="868680"/>
+            <a:ext cx="9610344" cy="868680"/>
           </a:xfrm>
           <a:prstGeom prst="rect">
             <a:avLst/>
@@ -4020,7 +4216,7 @@
                 </a:solidFill>
                 <a:latin typeface="Arial"/>
               </a:rPr>
-              <a:t>KIỂM CHỨNG BẰNG GEOGEBRA</a:t>
+              <a:t>VÍ DỤ 4</a:t>
             </a:r>
           </a:p>
         </p:txBody>
@@ -4099,7 +4295,7 @@
                 </a:solidFill>
                 <a:latin typeface="Calibri"/>
               </a:rPr>
-              <a:t>Toán 10 · Bài 3. Bất phương trình bậc nhất hai ẩn          17</a:t>
+              <a:t>Toán 10 · Bài 3. Bất phương trình bậc nhất hai ẩn          12</a:t>
             </a:r>
           </a:p>
         </p:txBody>
@@ -4113,7 +4309,7 @@
         <p:spPr>
           <a:xfrm>
             <a:off x="731520" y="1508760"/>
-            <a:ext cx="10789920" cy="1700784"/>
+            <a:ext cx="6400800" cy="2267712"/>
           </a:xfrm>
           <a:prstGeom prst="rect">
             <a:avLst/>
@@ -4125,6 +4321,22 @@
             <a:spAutoFit/>
           </a:bodyPr>
           <a:lstStyle/>
+          <a:p>
+            <a:pPr algn="l">
+              <a:spcAft>
+                <a:spcPts val="1000"/>
+              </a:spcAft>
+            </a:pPr>
+            <a:r>
+              <a:rPr sz="2400" b="1">
+                <a:solidFill>
+                  <a:srgbClr val="1E40AF"/>
+                </a:solidFill>
+                <a:latin typeface="Calibri"/>
+              </a:rPr>
+              <a:t>Biểu diễn miền nghiệm: 5x − 7y ≤ 0</a:t>
+            </a:r>
+          </a:p>
           <a:p>
             <a:pPr algn="l" marL="365760" indent="-365760">
               <a:spcAft>
@@ -4143,7 +4355,7 @@
                 </a:solidFill>
                 <a:latin typeface="Calibri"/>
               </a:rPr>
-              <a:t>Nhập trực tiếp: x + y &gt;= 100</a:t>
+              <a:t>c = 0 nên O nằm trên d</a:t>
             </a:r>
           </a:p>
           <a:p>
@@ -4164,7 +4376,25 @@
                 </a:solidFill>
                 <a:latin typeface="Calibri"/>
               </a:rPr>
-              <a:t>GeoGebra tô màu miền nghiệm</a:t>
+              <a:t>Không thử O; chọn M</a:t>
+            </a:r>
+            <a:r>
+              <a:rPr sz="2400" baseline="-25000">
+                <a:solidFill>
+                  <a:srgbClr val="1E293B"/>
+                </a:solidFill>
+                <a:latin typeface="Calibri"/>
+              </a:rPr>
+              <a:t>0</a:t>
+            </a:r>
+            <a:r>
+              <a:rPr sz="2400">
+                <a:solidFill>
+                  <a:srgbClr val="1E293B"/>
+                </a:solidFill>
+                <a:latin typeface="Calibri"/>
+              </a:rPr>
+              <a:t>(0; 1)</a:t>
             </a:r>
           </a:p>
           <a:p>
@@ -4185,7 +4415,7 @@
                 </a:solidFill>
                 <a:latin typeface="Calibri"/>
               </a:rPr>
-              <a:t>SGK gạch bỏ phần không là nghiệm</a:t>
+              <a:t>5·0 − 7·1 = −7 &lt; 0: đúng</a:t>
             </a:r>
           </a:p>
         </p:txBody>
@@ -4198,8 +4428,8 @@
         </p:nvSpPr>
         <p:spPr>
           <a:xfrm>
-            <a:off x="731520" y="3346704"/>
-            <a:ext cx="8686800" cy="685800"/>
+            <a:off x="731520" y="3913632"/>
+            <a:ext cx="6400800" cy="685800"/>
           </a:xfrm>
           <a:prstGeom prst="roundRect">
             <a:avLst>
@@ -4246,8 +4476,8 @@
         </p:nvSpPr>
         <p:spPr>
           <a:xfrm>
-            <a:off x="914400" y="3346704"/>
-            <a:ext cx="8321040" cy="685800"/>
+            <a:off x="914400" y="3913632"/>
+            <a:ext cx="6035040" cy="685800"/>
           </a:xfrm>
           <a:prstGeom prst="rect">
             <a:avLst/>
@@ -4272,7 +4502,93 @@
                 </a:solidFill>
                 <a:latin typeface="Calibri"/>
               </a:rPr>
-              <a:t>Vẽ tay trước, kiểm chứng sau</a:t>
+              <a:t>Miền nghiệm: nửa chứa M</a:t>
+            </a:r>
+            <a:r>
+              <a:rPr sz="2400" b="1" baseline="-25000">
+                <a:solidFill>
+                  <a:srgbClr val="991B1B"/>
+                </a:solidFill>
+                <a:latin typeface="Calibri"/>
+              </a:rPr>
+              <a:t>0</a:t>
+            </a:r>
+          </a:p>
+        </p:txBody>
+      </p:sp>
+      <p:pic>
+        <p:nvPicPr>
+          <p:cNvPr id="9" name="Picture 8" descr="rId13.png"/>
+          <p:cNvPicPr>
+            <a:picLocks noChangeAspect="1"/>
+          </p:cNvPicPr>
+          <p:nvPr/>
+        </p:nvPicPr>
+        <p:blipFill>
+          <a:blip r:embed="rId2"/>
+          <a:stretch>
+            <a:fillRect/>
+          </a:stretch>
+        </p:blipFill>
+        <p:spPr>
+          <a:xfrm>
+            <a:off x="7406640" y="1819003"/>
+            <a:ext cx="4389120" cy="3997234"/>
+          </a:xfrm>
+          <a:prstGeom prst="rect">
+            <a:avLst/>
+          </a:prstGeom>
+        </p:spPr>
+      </p:pic>
+      <p:sp>
+        <p:nvSpPr>
+          <p:cNvPr id="10" name="Rounded Rectangle 9"/>
+          <p:cNvSpPr/>
+          <p:nvPr/>
+        </p:nvSpPr>
+        <p:spPr>
+          <a:xfrm>
+            <a:off x="10463479" y="457200"/>
+            <a:ext cx="1179576" cy="457200"/>
+          </a:xfrm>
+          <a:prstGeom prst="roundRect">
+            <a:avLst/>
+          </a:prstGeom>
+          <a:solidFill>
+            <a:srgbClr val="166534"/>
+          </a:solidFill>
+          <a:ln>
+            <a:noFill/>
+          </a:ln>
+          <a:effectLst/>
+        </p:spPr>
+        <p:style>
+          <a:lnRef idx="1">
+            <a:schemeClr val="accent1"/>
+          </a:lnRef>
+          <a:fillRef idx="3">
+            <a:schemeClr val="accent1"/>
+          </a:fillRef>
+          <a:effectRef idx="2">
+            <a:schemeClr val="accent1"/>
+          </a:effectRef>
+          <a:fontRef idx="minor">
+            <a:schemeClr val="lt1"/>
+          </a:fontRef>
+        </p:style>
+        <p:txBody>
+          <a:bodyPr rtlCol="0" anchor="ctr" tIns="0" bIns="0"/>
+          <a:lstStyle/>
+          <a:p>
+            <a:pPr algn="ctr"/>
+            <a:r>
+              <a:rPr sz="1400" b="1">
+                <a:solidFill>
+                  <a:srgbClr val="FFFFFF"/>
+                </a:solidFill>
+                <a:latin typeface="Arial"/>
+              </a:rPr>
+              <a:t>LỜI GIẢI</a:t>
             </a:r>
           </a:p>
         </p:txBody>
@@ -4356,7 +4672,7 @@
         <p:spPr>
           <a:xfrm>
             <a:off x="731520" y="274320"/>
-            <a:ext cx="10972800" cy="868680"/>
+            <a:ext cx="9848088" cy="868680"/>
           </a:xfrm>
           <a:prstGeom prst="rect">
             <a:avLst/>
@@ -4376,7 +4692,7 @@
                 </a:solidFill>
                 <a:latin typeface="Arial"/>
               </a:rPr>
-              <a:t>TRẠM KIỂM CHỨNG AI</a:t>
+              <a:t>CHÚ Ý: KỂ BỜ, KHÔNG KỂ BỜ</a:t>
             </a:r>
           </a:p>
         </p:txBody>
@@ -4455,7 +4771,7 @@
                 </a:solidFill>
                 <a:latin typeface="Calibri"/>
               </a:rPr>
-              <a:t>Toán 10 · Bài 3. Bất phương trình bậc nhất hai ẩn          18</a:t>
+              <a:t>Toán 10 · Bài 3. Bất phương trình bậc nhất hai ẩn          13</a:t>
             </a:r>
           </a:p>
         </p:txBody>
@@ -4499,7 +4815,7 @@
                 </a:solidFill>
                 <a:latin typeface="Calibri"/>
               </a:rPr>
-              <a:t>Hỏi AI: miền nghiệm x − 3y &gt; −3</a:t>
+              <a:t>Luyện tập 2: biểu diễn miền nghiệm</a:t>
             </a:r>
           </a:p>
           <a:p>
@@ -4520,7 +4836,7 @@
                 </a:solidFill>
                 <a:latin typeface="Calibri"/>
               </a:rPr>
-              <a:t>Đối chiếu với hình vẽ tay</a:t>
+              <a:t>2x + y &lt; 200</a:t>
             </a:r>
           </a:p>
           <a:p>
@@ -4536,7 +4852,60 @@
                 </a:solidFill>
                 <a:latin typeface="Calibri"/>
               </a:rPr>
-              <a:t>Gợi mở: Tìm bước sai, giải thích, sửa lại</a:t>
+              <a:t>Gợi mở: Bờ d: nét liền hay nét đứt?</a:t>
+            </a:r>
+          </a:p>
+        </p:txBody>
+      </p:sp>
+      <p:sp>
+        <p:nvSpPr>
+          <p:cNvPr id="7" name="Rounded Rectangle 6"/>
+          <p:cNvSpPr/>
+          <p:nvPr/>
+        </p:nvSpPr>
+        <p:spPr>
+          <a:xfrm>
+            <a:off x="10701223" y="457200"/>
+            <a:ext cx="941832" cy="457200"/>
+          </a:xfrm>
+          <a:prstGeom prst="roundRect">
+            <a:avLst/>
+          </a:prstGeom>
+          <a:solidFill>
+            <a:srgbClr val="1E40AF"/>
+          </a:solidFill>
+          <a:ln>
+            <a:noFill/>
+          </a:ln>
+          <a:effectLst/>
+        </p:spPr>
+        <p:style>
+          <a:lnRef idx="1">
+            <a:schemeClr val="accent1"/>
+          </a:lnRef>
+          <a:fillRef idx="3">
+            <a:schemeClr val="accent1"/>
+          </a:fillRef>
+          <a:effectRef idx="2">
+            <a:schemeClr val="accent1"/>
+          </a:effectRef>
+          <a:fontRef idx="minor">
+            <a:schemeClr val="lt1"/>
+          </a:fontRef>
+        </p:style>
+        <p:txBody>
+          <a:bodyPr rtlCol="0" anchor="ctr" tIns="0" bIns="0"/>
+          <a:lstStyle/>
+          <a:p>
+            <a:pPr algn="ctr"/>
+            <a:r>
+              <a:rPr sz="1400" b="1">
+                <a:solidFill>
+                  <a:srgbClr val="FFFFFF"/>
+                </a:solidFill>
+                <a:latin typeface="Arial"/>
+              </a:rPr>
+              <a:t>ĐỀ BÀI</a:t>
             </a:r>
           </a:p>
         </p:txBody>
@@ -4620,7 +4989,7 @@
         <p:spPr>
           <a:xfrm>
             <a:off x="731520" y="274320"/>
-            <a:ext cx="10972800" cy="868680"/>
+            <a:ext cx="9610344" cy="868680"/>
           </a:xfrm>
           <a:prstGeom prst="rect">
             <a:avLst/>
@@ -4640,7 +5009,7 @@
                 </a:solidFill>
                 <a:latin typeface="Arial"/>
               </a:rPr>
-              <a:t>VẬN DỤNG: CƯỚC ĐIỆN THOẠI</a:t>
+              <a:t>CHÚ Ý: KỂ BỜ, KHÔNG KỂ BỜ</a:t>
             </a:r>
           </a:p>
         </p:txBody>
@@ -4719,7 +5088,7 @@
                 </a:solidFill>
                 <a:latin typeface="Calibri"/>
               </a:rPr>
-              <a:t>Toán 10 · Bài 3. Bất phương trình bậc nhất hai ẩn          20</a:t>
+              <a:t>Toán 10 · Bài 3. Bất phương trình bậc nhất hai ẩn          14</a:t>
             </a:r>
           </a:p>
         </p:txBody>
@@ -4733,7 +5102,7 @@
         <p:spPr>
           <a:xfrm>
             <a:off x="731520" y="1508760"/>
-            <a:ext cx="10789920" cy="2834640"/>
+            <a:ext cx="6400800" cy="1700784"/>
           </a:xfrm>
           <a:prstGeom prst="rect">
             <a:avLst/>
@@ -4745,6 +5114,22 @@
             <a:spAutoFit/>
           </a:bodyPr>
           <a:lstStyle/>
+          <a:p>
+            <a:pPr algn="l">
+              <a:spcAft>
+                <a:spcPts val="1000"/>
+              </a:spcAft>
+            </a:pPr>
+            <a:r>
+              <a:rPr sz="2400" b="1">
+                <a:solidFill>
+                  <a:srgbClr val="1E40AF"/>
+                </a:solidFill>
+                <a:latin typeface="Calibri"/>
+              </a:rPr>
+              <a:t>Luyện tập 2: 2x + y &lt; 200</a:t>
+            </a:r>
+          </a:p>
           <a:p>
             <a:pPr algn="l" marL="365760" indent="-365760">
               <a:spcAft>
@@ -4763,7 +5148,7 @@
                 </a:solidFill>
                 <a:latin typeface="Calibri"/>
               </a:rPr>
-              <a:t>Nội mạng 1 nghìn, ngoại mạng 2 nghìn/phút</a:t>
+              <a:t>d qua (100; 0) và (0; 200)</a:t>
             </a:r>
           </a:p>
           <a:p>
@@ -4784,70 +5169,187 @@
                 </a:solidFill>
                 <a:latin typeface="Calibri"/>
               </a:rPr>
-              <a:t>Tổng tiền dưới 200 nghìn đồng</a:t>
-            </a:r>
-          </a:p>
-          <a:p>
-            <a:pPr algn="l" marL="365760" indent="-365760">
+              <a:t>O: 0 &lt; 200 → giữ nửa chứa O</a:t>
+            </a:r>
+          </a:p>
+        </p:txBody>
+      </p:sp>
+      <p:sp>
+        <p:nvSpPr>
+          <p:cNvPr id="7" name="Rounded Rectangle 6"/>
+          <p:cNvSpPr/>
+          <p:nvPr/>
+        </p:nvSpPr>
+        <p:spPr>
+          <a:xfrm>
+            <a:off x="731520" y="3346704"/>
+            <a:ext cx="6400800" cy="1143000"/>
+          </a:xfrm>
+          <a:prstGeom prst="roundRect">
+            <a:avLst>
+              <a:gd name="adj" fmla="val 8000"/>
+            </a:avLst>
+          </a:prstGeom>
+          <a:solidFill>
+            <a:srgbClr val="FEF2F2"/>
+          </a:solidFill>
+          <a:ln w="19050">
+            <a:solidFill>
+              <a:srgbClr val="991B1B"/>
+            </a:solidFill>
+          </a:ln>
+          <a:effectLst/>
+        </p:spPr>
+        <p:style>
+          <a:lnRef idx="1">
+            <a:schemeClr val="accent1"/>
+          </a:lnRef>
+          <a:fillRef idx="3">
+            <a:schemeClr val="accent1"/>
+          </a:fillRef>
+          <a:effectRef idx="2">
+            <a:schemeClr val="accent1"/>
+          </a:effectRef>
+          <a:fontRef idx="minor">
+            <a:schemeClr val="lt1"/>
+          </a:fontRef>
+        </p:style>
+        <p:txBody>
+          <a:bodyPr rtlCol="0" anchor="ctr"/>
+          <a:lstStyle/>
+          <a:p>
+            <a:pPr algn="ctr"/>
+          </a:p>
+        </p:txBody>
+      </p:sp>
+      <p:sp>
+        <p:nvSpPr>
+          <p:cNvPr id="8" name="TextBox 7"/>
+          <p:cNvSpPr txBox="1"/>
+          <p:nvPr/>
+        </p:nvSpPr>
+        <p:spPr>
+          <a:xfrm>
+            <a:off x="914400" y="3346704"/>
+            <a:ext cx="6035040" cy="1143000"/>
+          </a:xfrm>
+          <a:prstGeom prst="rect">
+            <a:avLst/>
+          </a:prstGeom>
+          <a:noFill/>
+        </p:spPr>
+        <p:txBody>
+          <a:bodyPr wrap="square" anchor="ctr">
+            <a:spAutoFit/>
+          </a:bodyPr>
+          <a:lstStyle/>
+          <a:p>
+            <a:pPr algn="l">
               <a:spcAft>
-                <a:spcPts val="1000"/>
+                <a:spcPts val="400"/>
               </a:spcAft>
-              <a:buClr>
-                <a:srgbClr val="1E40AF"/>
-              </a:buClr>
-              <a:buFont typeface="Arial"/>
-              <a:buChar char="•"/>
             </a:pPr>
             <a:r>
-              <a:rPr sz="2400">
-                <a:solidFill>
-                  <a:srgbClr val="1E293B"/>
-                </a:solidFill>
-                <a:latin typeface="Calibri"/>
-              </a:rPr>
-              <a:t>a) Lập bất phương trình</a:t>
-            </a:r>
-          </a:p>
-          <a:p>
-            <a:pPr algn="l" marL="365760" indent="-365760">
+              <a:rPr sz="2400" b="1">
+                <a:solidFill>
+                  <a:srgbClr val="991B1B"/>
+                </a:solidFill>
+                <a:latin typeface="Calibri"/>
+              </a:rPr>
+              <a:t>&lt;, &gt; : bỏ bờ, vẽ nét đứt</a:t>
+            </a:r>
+          </a:p>
+          <a:p>
+            <a:pPr algn="l">
               <a:spcAft>
-                <a:spcPts val="1000"/>
+                <a:spcPts val="400"/>
               </a:spcAft>
-              <a:buClr>
-                <a:srgbClr val="1E40AF"/>
-              </a:buClr>
-              <a:buFont typeface="Arial"/>
-              <a:buChar char="•"/>
             </a:pPr>
             <a:r>
-              <a:rPr sz="2400">
-                <a:solidFill>
-                  <a:srgbClr val="1E293B"/>
-                </a:solidFill>
-                <a:latin typeface="Calibri"/>
-              </a:rPr>
-              <a:t>b) Biểu diễn miền nghiệm</a:t>
-            </a:r>
-          </a:p>
-          <a:p>
-            <a:pPr algn="l" marL="365760" indent="-365760">
-              <a:spcAft>
-                <a:spcPts val="1000"/>
-              </a:spcAft>
-              <a:buClr>
-                <a:srgbClr val="1E40AF"/>
-              </a:buClr>
-              <a:buFont typeface="Arial"/>
-              <a:buChar char="•"/>
-            </a:pPr>
-            <a:r>
-              <a:rPr sz="2400">
-                <a:solidFill>
-                  <a:srgbClr val="1E293B"/>
-                </a:solidFill>
-                <a:latin typeface="Calibri"/>
-              </a:rPr>
-              <a:t>c) Gọi 100 phút nội, 40 phút ngoại?</a:t>
+              <a:rPr sz="2400" b="1">
+                <a:solidFill>
+                  <a:srgbClr val="991B1B"/>
+                </a:solidFill>
+                <a:latin typeface="Calibri"/>
+              </a:rPr>
+              <a:t>≤, ≥ : kể bờ, vẽ nét liền</a:t>
+            </a:r>
+          </a:p>
+        </p:txBody>
+      </p:sp>
+      <p:pic>
+        <p:nvPicPr>
+          <p:cNvPr id="9" name="Picture 8" descr="rId15.png"/>
+          <p:cNvPicPr>
+            <a:picLocks noChangeAspect="1"/>
+          </p:cNvPicPr>
+          <p:nvPr/>
+        </p:nvPicPr>
+        <p:blipFill>
+          <a:blip r:embed="rId2"/>
+          <a:stretch>
+            <a:fillRect/>
+          </a:stretch>
+        </p:blipFill>
+        <p:spPr>
+          <a:xfrm>
+            <a:off x="7406640" y="1941241"/>
+            <a:ext cx="4389120" cy="3752757"/>
+          </a:xfrm>
+          <a:prstGeom prst="rect">
+            <a:avLst/>
+          </a:prstGeom>
+        </p:spPr>
+      </p:pic>
+      <p:sp>
+        <p:nvSpPr>
+          <p:cNvPr id="10" name="Rounded Rectangle 9"/>
+          <p:cNvSpPr/>
+          <p:nvPr/>
+        </p:nvSpPr>
+        <p:spPr>
+          <a:xfrm>
+            <a:off x="10463479" y="457200"/>
+            <a:ext cx="1179576" cy="457200"/>
+          </a:xfrm>
+          <a:prstGeom prst="roundRect">
+            <a:avLst/>
+          </a:prstGeom>
+          <a:solidFill>
+            <a:srgbClr val="166534"/>
+          </a:solidFill>
+          <a:ln>
+            <a:noFill/>
+          </a:ln>
+          <a:effectLst/>
+        </p:spPr>
+        <p:style>
+          <a:lnRef idx="1">
+            <a:schemeClr val="accent1"/>
+          </a:lnRef>
+          <a:fillRef idx="3">
+            <a:schemeClr val="accent1"/>
+          </a:fillRef>
+          <a:effectRef idx="2">
+            <a:schemeClr val="accent1"/>
+          </a:effectRef>
+          <a:fontRef idx="minor">
+            <a:schemeClr val="lt1"/>
+          </a:fontRef>
+        </p:style>
+        <p:txBody>
+          <a:bodyPr rtlCol="0" anchor="ctr" tIns="0" bIns="0"/>
+          <a:lstStyle/>
+          <a:p>
+            <a:pPr algn="ctr"/>
+            <a:r>
+              <a:rPr sz="1400" b="1">
+                <a:solidFill>
+                  <a:srgbClr val="FFFFFF"/>
+                </a:solidFill>
+                <a:latin typeface="Arial"/>
+              </a:rPr>
+              <a:t>LỜI GIẢI</a:t>
             </a:r>
           </a:p>
         </p:txBody>
@@ -4931,7 +5433,7 @@
         <p:spPr>
           <a:xfrm>
             <a:off x="731520" y="274320"/>
-            <a:ext cx="10972800" cy="868680"/>
+            <a:ext cx="9848088" cy="868680"/>
           </a:xfrm>
           <a:prstGeom prst="rect">
             <a:avLst/>
@@ -4951,7 +5453,7 @@
                 </a:solidFill>
                 <a:latin typeface="Arial"/>
               </a:rPr>
-              <a:t>NHIỆM VỤ VỀ NHÀ: CHI TIÊU TRONG NGÂN SÁCH</a:t>
+              <a:t>GIẢI BÀI TOÁN MỞ ĐẦU</a:t>
             </a:r>
           </a:p>
         </p:txBody>
@@ -5030,7 +5532,7 @@
                 </a:solidFill>
                 <a:latin typeface="Calibri"/>
               </a:rPr>
-              <a:t>Toán 10 · Bài 3. Bất phương trình bậc nhất hai ẩn          22</a:t>
+              <a:t>Toán 10 · Bài 3. Bất phương trình bậc nhất hai ẩn          15</a:t>
             </a:r>
           </a:p>
         </p:txBody>
@@ -5044,7 +5546,7 @@
         <p:spPr>
           <a:xfrm>
             <a:off x="731520" y="1508760"/>
-            <a:ext cx="10789920" cy="3401568"/>
+            <a:ext cx="10789920" cy="2834640"/>
           </a:xfrm>
           <a:prstGeom prst="rect">
             <a:avLst/>
@@ -5074,7 +5576,7 @@
                 </a:solidFill>
                 <a:latin typeface="Calibri"/>
               </a:rPr>
-              <a:t>Chọn tình huống ở gia đình, địa phương</a:t>
+              <a:t>Vé loại 1: 50 000 đồng</a:t>
             </a:r>
           </a:p>
           <a:p>
@@ -5095,7 +5597,7 @@
                 </a:solidFill>
                 <a:latin typeface="Calibri"/>
               </a:rPr>
-              <a:t>Ví dụ: mua phân bón cà phê</a:t>
+              <a:t>Vé loại 2: 100 000 đồng</a:t>
             </a:r>
           </a:p>
           <a:p>
@@ -5116,7 +5618,7 @@
                 </a:solidFill>
                 <a:latin typeface="Calibri"/>
               </a:rPr>
-              <a:t>Tìm giá thực tế, ghi nguồn</a:t>
+              <a:t>Bù lỗ khi thu dưới 20 triệu đồng</a:t>
             </a:r>
           </a:p>
           <a:p>
@@ -5137,49 +5639,76 @@
                 </a:solidFill>
                 <a:latin typeface="Calibri"/>
               </a:rPr>
-              <a:t>Lập BPT, vẽ miền nghiệm GeoGebra</a:t>
-            </a:r>
-          </a:p>
-          <a:p>
-            <a:pPr algn="l" marL="365760" indent="-365760">
+              <a:t>Bán thế nào thì rạp bù lỗ?</a:t>
+            </a:r>
+          </a:p>
+          <a:p>
+            <a:pPr algn="l">
               <a:spcAft>
                 <a:spcPts val="1000"/>
               </a:spcAft>
-              <a:buClr>
-                <a:srgbClr val="1E40AF"/>
-              </a:buClr>
-              <a:buFont typeface="Arial"/>
-              <a:buChar char="•"/>
             </a:pPr>
             <a:r>
-              <a:rPr sz="2400">
-                <a:solidFill>
-                  <a:srgbClr val="1E293B"/>
-                </a:solidFill>
-                <a:latin typeface="Calibri"/>
-              </a:rPr>
-              <a:t>Đề xuất 3 phương án mua</a:t>
-            </a:r>
-          </a:p>
-          <a:p>
-            <a:pPr algn="l" marL="365760" indent="-365760">
-              <a:spcAft>
-                <a:spcPts val="1000"/>
-              </a:spcAft>
-              <a:buClr>
-                <a:srgbClr val="1E40AF"/>
-              </a:buClr>
-              <a:buFont typeface="Arial"/>
-              <a:buChar char="•"/>
-            </a:pPr>
-            <a:r>
-              <a:rPr sz="2400">
-                <a:solidFill>
-                  <a:srgbClr val="1E293B"/>
-                </a:solidFill>
-                <a:latin typeface="Calibri"/>
-              </a:rPr>
-              <a:t>Nộp 3–5 slide kèm Nhật ký AI</a:t>
+              <a:rPr sz="2400" b="1">
+                <a:solidFill>
+                  <a:srgbClr val="1E40AF"/>
+                </a:solidFill>
+                <a:latin typeface="Calibri"/>
+              </a:rPr>
+              <a:t>Gợi mở: Lập BPT, vẽ miền nghiệm</a:t>
+            </a:r>
+          </a:p>
+        </p:txBody>
+      </p:sp>
+      <p:sp>
+        <p:nvSpPr>
+          <p:cNvPr id="7" name="Rounded Rectangle 6"/>
+          <p:cNvSpPr/>
+          <p:nvPr/>
+        </p:nvSpPr>
+        <p:spPr>
+          <a:xfrm>
+            <a:off x="10701223" y="457200"/>
+            <a:ext cx="941832" cy="457200"/>
+          </a:xfrm>
+          <a:prstGeom prst="roundRect">
+            <a:avLst/>
+          </a:prstGeom>
+          <a:solidFill>
+            <a:srgbClr val="1E40AF"/>
+          </a:solidFill>
+          <a:ln>
+            <a:noFill/>
+          </a:ln>
+          <a:effectLst/>
+        </p:spPr>
+        <p:style>
+          <a:lnRef idx="1">
+            <a:schemeClr val="accent1"/>
+          </a:lnRef>
+          <a:fillRef idx="3">
+            <a:schemeClr val="accent1"/>
+          </a:fillRef>
+          <a:effectRef idx="2">
+            <a:schemeClr val="accent1"/>
+          </a:effectRef>
+          <a:fontRef idx="minor">
+            <a:schemeClr val="lt1"/>
+          </a:fontRef>
+        </p:style>
+        <p:txBody>
+          <a:bodyPr rtlCol="0" anchor="ctr" tIns="0" bIns="0"/>
+          <a:lstStyle/>
+          <a:p>
+            <a:pPr algn="ctr"/>
+            <a:r>
+              <a:rPr sz="1400" b="1">
+                <a:solidFill>
+                  <a:srgbClr val="FFFFFF"/>
+                </a:solidFill>
+                <a:latin typeface="Arial"/>
+              </a:rPr>
+              <a:t>ĐỀ BÀI</a:t>
             </a:r>
           </a:p>
         </p:txBody>
@@ -5263,7 +5792,7 @@
         <p:spPr>
           <a:xfrm>
             <a:off x="731520" y="274320"/>
-            <a:ext cx="10972800" cy="868680"/>
+            <a:ext cx="9610344" cy="868680"/>
           </a:xfrm>
           <a:prstGeom prst="rect">
             <a:avLst/>
@@ -5283,7 +5812,7 @@
                 </a:solidFill>
                 <a:latin typeface="Arial"/>
               </a:rPr>
-              <a:t>SƠ ĐỒ TƯ DUY BÀI HỌC</a:t>
+              <a:t>GIẢI BÀI TOÁN MỞ ĐẦU</a:t>
             </a:r>
           </a:p>
         </p:txBody>
@@ -5362,14 +5891,182 @@
                 </a:solidFill>
                 <a:latin typeface="Calibri"/>
               </a:rPr>
-              <a:t>Toán 10 · Bài 3. Bất phương trình bậc nhất hai ẩn          23</a:t>
+              <a:t>Toán 10 · Bài 3. Bất phương trình bậc nhất hai ẩn          16</a:t>
+            </a:r>
+          </a:p>
+        </p:txBody>
+      </p:sp>
+      <p:sp>
+        <p:nvSpPr>
+          <p:cNvPr id="6" name="TextBox 5"/>
+          <p:cNvSpPr txBox="1"/>
+          <p:nvPr/>
+        </p:nvSpPr>
+        <p:spPr>
+          <a:xfrm>
+            <a:off x="731520" y="1508760"/>
+            <a:ext cx="6400800" cy="1700784"/>
+          </a:xfrm>
+          <a:prstGeom prst="rect">
+            <a:avLst/>
+          </a:prstGeom>
+          <a:noFill/>
+        </p:spPr>
+        <p:txBody>
+          <a:bodyPr wrap="square" anchor="t">
+            <a:spAutoFit/>
+          </a:bodyPr>
+          <a:lstStyle/>
+          <a:p>
+            <a:pPr algn="l">
+              <a:spcAft>
+                <a:spcPts val="1000"/>
+              </a:spcAft>
+            </a:pPr>
+            <a:r>
+              <a:rPr sz="2400" b="1">
+                <a:solidFill>
+                  <a:srgbClr val="1E40AF"/>
+                </a:solidFill>
+                <a:latin typeface="Calibri"/>
+              </a:rPr>
+              <a:t>50x + 100y &lt; 20 000 ⇔ x + 2y &lt; 400</a:t>
+            </a:r>
+          </a:p>
+          <a:p>
+            <a:pPr algn="l" marL="365760" indent="-365760">
+              <a:spcAft>
+                <a:spcPts val="1000"/>
+              </a:spcAft>
+              <a:buClr>
+                <a:srgbClr val="1E40AF"/>
+              </a:buClr>
+              <a:buFont typeface="Arial"/>
+              <a:buChar char="•"/>
+            </a:pPr>
+            <a:r>
+              <a:rPr sz="2400">
+                <a:solidFill>
+                  <a:srgbClr val="1E293B"/>
+                </a:solidFill>
+                <a:latin typeface="Calibri"/>
+              </a:rPr>
+              <a:t>Trên đoạn AB: hòa vốn</a:t>
+            </a:r>
+          </a:p>
+          <a:p>
+            <a:pPr algn="l" marL="365760" indent="-365760">
+              <a:spcAft>
+                <a:spcPts val="1000"/>
+              </a:spcAft>
+              <a:buClr>
+                <a:srgbClr val="1E40AF"/>
+              </a:buClr>
+              <a:buFont typeface="Arial"/>
+              <a:buChar char="•"/>
+            </a:pPr>
+            <a:r>
+              <a:rPr sz="2400">
+                <a:solidFill>
+                  <a:srgbClr val="1E293B"/>
+                </a:solidFill>
+                <a:latin typeface="Calibri"/>
+              </a:rPr>
+              <a:t>(150; 150): có lãi</a:t>
+            </a:r>
+          </a:p>
+        </p:txBody>
+      </p:sp>
+      <p:sp>
+        <p:nvSpPr>
+          <p:cNvPr id="7" name="Rounded Rectangle 6"/>
+          <p:cNvSpPr/>
+          <p:nvPr/>
+        </p:nvSpPr>
+        <p:spPr>
+          <a:xfrm>
+            <a:off x="731520" y="3346704"/>
+            <a:ext cx="6400800" cy="685800"/>
+          </a:xfrm>
+          <a:prstGeom prst="roundRect">
+            <a:avLst>
+              <a:gd name="adj" fmla="val 8000"/>
+            </a:avLst>
+          </a:prstGeom>
+          <a:solidFill>
+            <a:srgbClr val="FEF2F2"/>
+          </a:solidFill>
+          <a:ln w="19050">
+            <a:solidFill>
+              <a:srgbClr val="991B1B"/>
+            </a:solidFill>
+          </a:ln>
+          <a:effectLst/>
+        </p:spPr>
+        <p:style>
+          <a:lnRef idx="1">
+            <a:schemeClr val="accent1"/>
+          </a:lnRef>
+          <a:fillRef idx="3">
+            <a:schemeClr val="accent1"/>
+          </a:fillRef>
+          <a:effectRef idx="2">
+            <a:schemeClr val="accent1"/>
+          </a:effectRef>
+          <a:fontRef idx="minor">
+            <a:schemeClr val="lt1"/>
+          </a:fontRef>
+        </p:style>
+        <p:txBody>
+          <a:bodyPr rtlCol="0" anchor="ctr"/>
+          <a:lstStyle/>
+          <a:p>
+            <a:pPr algn="ctr"/>
+          </a:p>
+        </p:txBody>
+      </p:sp>
+      <p:sp>
+        <p:nvSpPr>
+          <p:cNvPr id="8" name="TextBox 7"/>
+          <p:cNvSpPr txBox="1"/>
+          <p:nvPr/>
+        </p:nvSpPr>
+        <p:spPr>
+          <a:xfrm>
+            <a:off x="914400" y="3346704"/>
+            <a:ext cx="6035040" cy="685800"/>
+          </a:xfrm>
+          <a:prstGeom prst="rect">
+            <a:avLst/>
+          </a:prstGeom>
+          <a:noFill/>
+        </p:spPr>
+        <p:txBody>
+          <a:bodyPr wrap="square" anchor="ctr">
+            <a:spAutoFit/>
+          </a:bodyPr>
+          <a:lstStyle/>
+          <a:p>
+            <a:pPr algn="l">
+              <a:spcAft>
+                <a:spcPts val="400"/>
+              </a:spcAft>
+            </a:pPr>
+            <a:r>
+              <a:rPr sz="2400" b="1">
+                <a:solidFill>
+                  <a:srgbClr val="991B1B"/>
+                </a:solidFill>
+                <a:latin typeface="Calibri"/>
+              </a:rPr>
+              <a:t>Trong tam giác, bỏ AB: bù lỗ</a:t>
             </a:r>
           </a:p>
         </p:txBody>
       </p:sp>
       <p:pic>
         <p:nvPicPr>
-          <p:cNvPr id="6" name="Picture 5" descr="rId17.png"/>
+          <p:cNvPr id="9" name="Picture 8" descr="rId14.png"/>
           <p:cNvPicPr>
             <a:picLocks noChangeAspect="1"/>
           </p:cNvPicPr>
@@ -5383,14 +6080,67 @@
         </p:blipFill>
         <p:spPr>
           <a:xfrm>
-            <a:off x="2452400" y="1417320"/>
-            <a:ext cx="7256720" cy="4800600"/>
+            <a:off x="7406640" y="2372868"/>
+            <a:ext cx="4389120" cy="2889504"/>
           </a:xfrm>
           <a:prstGeom prst="rect">
             <a:avLst/>
           </a:prstGeom>
         </p:spPr>
       </p:pic>
+      <p:sp>
+        <p:nvSpPr>
+          <p:cNvPr id="10" name="Rounded Rectangle 9"/>
+          <p:cNvSpPr/>
+          <p:nvPr/>
+        </p:nvSpPr>
+        <p:spPr>
+          <a:xfrm>
+            <a:off x="10463479" y="457200"/>
+            <a:ext cx="1179576" cy="457200"/>
+          </a:xfrm>
+          <a:prstGeom prst="roundRect">
+            <a:avLst/>
+          </a:prstGeom>
+          <a:solidFill>
+            <a:srgbClr val="166534"/>
+          </a:solidFill>
+          <a:ln>
+            <a:noFill/>
+          </a:ln>
+          <a:effectLst/>
+        </p:spPr>
+        <p:style>
+          <a:lnRef idx="1">
+            <a:schemeClr val="accent1"/>
+          </a:lnRef>
+          <a:fillRef idx="3">
+            <a:schemeClr val="accent1"/>
+          </a:fillRef>
+          <a:effectRef idx="2">
+            <a:schemeClr val="accent1"/>
+          </a:effectRef>
+          <a:fontRef idx="minor">
+            <a:schemeClr val="lt1"/>
+          </a:fontRef>
+        </p:style>
+        <p:txBody>
+          <a:bodyPr rtlCol="0" anchor="ctr" tIns="0" bIns="0"/>
+          <a:lstStyle/>
+          <a:p>
+            <a:pPr algn="ctr"/>
+            <a:r>
+              <a:rPr sz="1400" b="1">
+                <a:solidFill>
+                  <a:srgbClr val="FFFFFF"/>
+                </a:solidFill>
+                <a:latin typeface="Arial"/>
+              </a:rPr>
+              <a:t>LỜI GIẢI</a:t>
+            </a:r>
+          </a:p>
+        </p:txBody>
+      </p:sp>
     </p:spTree>
   </p:cSld>
   <p:clrMapOvr>
@@ -5490,7 +6240,7 @@
                 </a:solidFill>
                 <a:latin typeface="Arial"/>
               </a:rPr>
-              <a:t>BÀI TẬP CỦA BẠN</a:t>
+              <a:t>KIỂM CHỨNG BẰNG GEOGEBRA</a:t>
             </a:r>
           </a:p>
         </p:txBody>
@@ -5569,91 +6319,21 @@
                 </a:solidFill>
                 <a:latin typeface="Calibri"/>
               </a:rPr>
-              <a:t>Toán 10 · Bài 3. Bất phương trình bậc nhất hai ẩn          24</a:t>
-            </a:r>
-          </a:p>
-        </p:txBody>
-      </p:sp>
-      <p:sp>
-        <p:nvSpPr>
-          <p:cNvPr id="6" name="Rectangle 5"/>
-          <p:cNvSpPr/>
-          <p:nvPr/>
-        </p:nvSpPr>
-        <p:spPr>
-          <a:xfrm>
-            <a:off x="731520" y="1463040"/>
-            <a:ext cx="4572000" cy="4572000"/>
-          </a:xfrm>
-          <a:prstGeom prst="rect">
-            <a:avLst/>
-          </a:prstGeom>
-          <a:solidFill>
-            <a:srgbClr val="F8FAFC"/>
-          </a:solidFill>
-          <a:ln w="19050">
-            <a:solidFill>
-              <a:srgbClr val="E2E8F0"/>
-            </a:solidFill>
-          </a:ln>
-          <a:effectLst/>
-        </p:spPr>
-        <p:style>
-          <a:lnRef idx="1">
-            <a:schemeClr val="accent1"/>
-          </a:lnRef>
-          <a:fillRef idx="3">
-            <a:schemeClr val="accent1"/>
-          </a:fillRef>
-          <a:effectRef idx="2">
-            <a:schemeClr val="accent1"/>
-          </a:effectRef>
-          <a:fontRef idx="minor">
-            <a:schemeClr val="lt1"/>
-          </a:fontRef>
-        </p:style>
-        <p:txBody>
-          <a:bodyPr rtlCol="0" anchor="ctr"/>
-          <a:lstStyle/>
-          <a:p>
-            <a:pPr algn="ctr"/>
-          </a:p>
-        </p:txBody>
-      </p:sp>
-      <p:pic>
-        <p:nvPicPr>
-          <p:cNvPr id="7" name="Picture 6" descr="QR_CungCo_Bai3_Toan10.png"/>
-          <p:cNvPicPr>
-            <a:picLocks noChangeAspect="1"/>
-          </p:cNvPicPr>
-          <p:nvPr/>
-        </p:nvPicPr>
-        <p:blipFill>
-          <a:blip r:embed="rId2"/>
-          <a:stretch>
-            <a:fillRect/>
-          </a:stretch>
-        </p:blipFill>
-        <p:spPr>
-          <a:xfrm>
-            <a:off x="960120" y="1691640"/>
-            <a:ext cx="4114800" cy="4114800"/>
-          </a:xfrm>
-          <a:prstGeom prst="rect">
-            <a:avLst/>
-          </a:prstGeom>
-        </p:spPr>
-      </p:pic>
-      <p:sp>
-        <p:nvSpPr>
-          <p:cNvPr id="8" name="TextBox 7"/>
+              <a:t>Toán 10 · Bài 3. Bất phương trình bậc nhất hai ẩn          17</a:t>
+            </a:r>
+          </a:p>
+        </p:txBody>
+      </p:sp>
+      <p:sp>
+        <p:nvSpPr>
+          <p:cNvPr id="6" name="TextBox 5"/>
           <p:cNvSpPr txBox="1"/>
           <p:nvPr/>
         </p:nvSpPr>
         <p:spPr>
           <a:xfrm>
-            <a:off x="5760720" y="1554480"/>
-            <a:ext cx="6035040" cy="3108960"/>
+            <a:off x="731520" y="1508760"/>
+            <a:ext cx="10789920" cy="1700784"/>
           </a:xfrm>
           <a:prstGeom prst="rect">
             <a:avLst/>
@@ -5677,13 +6357,13 @@
               <a:buChar char="•"/>
             </a:pPr>
             <a:r>
-              <a:rPr sz="2600">
+              <a:rPr sz="2400">
                 <a:solidFill>
                   <a:srgbClr val="1E293B"/>
                 </a:solidFill>
                 <a:latin typeface="Calibri"/>
               </a:rPr>
-              <a:t>Quét mã QR bằng điện thoại</a:t>
+              <a:t>Nhập trực tiếp: x + y &gt;= 100</a:t>
             </a:r>
           </a:p>
           <a:p>
@@ -5698,13 +6378,13 @@
               <a:buChar char="•"/>
             </a:pPr>
             <a:r>
-              <a:rPr sz="2600">
+              <a:rPr sz="2400">
                 <a:solidFill>
                   <a:srgbClr val="1E293B"/>
                 </a:solidFill>
                 <a:latin typeface="Calibri"/>
               </a:rPr>
-              <a:t>Nhập họ tên và lớp</a:t>
+              <a:t>GeoGebra tô màu miền nghiệm</a:t>
             </a:r>
           </a:p>
           <a:p>
@@ -5719,48 +6399,75 @@
               <a:buChar char="•"/>
             </a:pPr>
             <a:r>
-              <a:rPr sz="2600">
+              <a:rPr sz="2400">
                 <a:solidFill>
                   <a:srgbClr val="1E293B"/>
                 </a:solidFill>
                 <a:latin typeface="Calibri"/>
               </a:rPr>
-              <a:t>7 câu – làm trong 7 phút</a:t>
-            </a:r>
-          </a:p>
-          <a:p>
-            <a:pPr algn="l" marL="365760" indent="-365760">
-              <a:spcAft>
-                <a:spcPts val="1000"/>
-              </a:spcAft>
-              <a:buClr>
-                <a:srgbClr val="1E40AF"/>
-              </a:buClr>
-              <a:buFont typeface="Arial"/>
-              <a:buChar char="•"/>
-            </a:pPr>
-            <a:r>
-              <a:rPr sz="2600">
-                <a:solidFill>
-                  <a:srgbClr val="1E293B"/>
-                </a:solidFill>
-                <a:latin typeface="Calibri"/>
-              </a:rPr>
-              <a:t>Nộp bài, xem lời giải</a:t>
-            </a:r>
-          </a:p>
-        </p:txBody>
-      </p:sp>
-      <p:sp>
-        <p:nvSpPr>
-          <p:cNvPr id="9" name="TextBox 8"/>
+              <a:t>SGK gạch bỏ phần không là nghiệm</a:t>
+            </a:r>
+          </a:p>
+        </p:txBody>
+      </p:sp>
+      <p:sp>
+        <p:nvSpPr>
+          <p:cNvPr id="7" name="Rounded Rectangle 6"/>
+          <p:cNvSpPr/>
+          <p:nvPr/>
+        </p:nvSpPr>
+        <p:spPr>
+          <a:xfrm>
+            <a:off x="731520" y="3346704"/>
+            <a:ext cx="8686800" cy="685800"/>
+          </a:xfrm>
+          <a:prstGeom prst="roundRect">
+            <a:avLst>
+              <a:gd name="adj" fmla="val 8000"/>
+            </a:avLst>
+          </a:prstGeom>
+          <a:solidFill>
+            <a:srgbClr val="FEF2F2"/>
+          </a:solidFill>
+          <a:ln w="19050">
+            <a:solidFill>
+              <a:srgbClr val="991B1B"/>
+            </a:solidFill>
+          </a:ln>
+          <a:effectLst/>
+        </p:spPr>
+        <p:style>
+          <a:lnRef idx="1">
+            <a:schemeClr val="accent1"/>
+          </a:lnRef>
+          <a:fillRef idx="3">
+            <a:schemeClr val="accent1"/>
+          </a:fillRef>
+          <a:effectRef idx="2">
+            <a:schemeClr val="accent1"/>
+          </a:effectRef>
+          <a:fontRef idx="minor">
+            <a:schemeClr val="lt1"/>
+          </a:fontRef>
+        </p:style>
+        <p:txBody>
+          <a:bodyPr rtlCol="0" anchor="ctr"/>
+          <a:lstStyle/>
+          <a:p>
+            <a:pPr algn="ctr"/>
+          </a:p>
+        </p:txBody>
+      </p:sp>
+      <p:sp>
+        <p:nvSpPr>
+          <p:cNvPr id="8" name="TextBox 7"/>
           <p:cNvSpPr txBox="1"/>
           <p:nvPr/>
         </p:nvSpPr>
         <p:spPr>
           <a:xfrm>
-            <a:off x="5760720" y="4754880"/>
-            <a:ext cx="6035040" cy="1188720"/>
+            <a:off x="914400" y="3346704"/>
+            <a:ext cx="8321040" cy="685800"/>
           </a:xfrm>
           <a:prstGeom prst="rect">
             <a:avLst/>
@@ -5768,25 +6475,24 @@
           <a:noFill/>
         </p:spPr>
         <p:txBody>
-          <a:bodyPr wrap="square" anchor="t">
+          <a:bodyPr wrap="square" anchor="ctr">
             <a:spAutoFit/>
           </a:bodyPr>
           <a:lstStyle/>
           <a:p>
             <a:pPr algn="l">
               <a:spcAft>
-                <a:spcPts val="1000"/>
+                <a:spcPts val="400"/>
               </a:spcAft>
             </a:pPr>
             <a:r>
-              <a:rPr sz="1800" b="1">
-                <a:solidFill>
-                  <a:srgbClr val="1E40AF"/>
-                </a:solidFill>
-                <a:latin typeface="Calibri"/>
-                <a:hlinkClick r:id="rId3"/>
-              </a:rPr>
-              <a:t>trangtu66.github.io/Taode_thi_online/cc_bai3_t10.html</a:t>
+              <a:rPr sz="2400" b="1">
+                <a:solidFill>
+                  <a:srgbClr val="991B1B"/>
+                </a:solidFill>
+                <a:latin typeface="Calibri"/>
+              </a:rPr>
+              <a:t>Vẽ tay trước, kiểm chứng sau</a:t>
             </a:r>
           </a:p>
         </p:txBody>
@@ -5870,7 +6576,7 @@
         <p:spPr>
           <a:xfrm>
             <a:off x="731520" y="274320"/>
-            <a:ext cx="10972800" cy="868680"/>
+            <a:ext cx="9848088" cy="868680"/>
           </a:xfrm>
           <a:prstGeom prst="rect">
             <a:avLst/>
@@ -5890,7 +6596,7 @@
                 </a:solidFill>
                 <a:latin typeface="Arial"/>
               </a:rPr>
-              <a:t>VẬN DỤNG – LỜI GIẢI</a:t>
+              <a:t>TRẠM KIỂM CHỨNG AI</a:t>
             </a:r>
           </a:p>
         </p:txBody>
@@ -5969,7 +6675,7 @@
                 </a:solidFill>
                 <a:latin typeface="Calibri"/>
               </a:rPr>
-              <a:t>Toán 10 · Bài 3. Bất phương trình bậc nhất hai ẩn          21</a:t>
+              <a:t>Toán 10 · Bài 3. Bất phương trình bậc nhất hai ẩn          18</a:t>
             </a:r>
           </a:p>
         </p:txBody>
@@ -5983,7 +6689,7 @@
         <p:spPr>
           <a:xfrm>
             <a:off x="731520" y="1508760"/>
-            <a:ext cx="6400800" cy="1700784"/>
+            <a:ext cx="10789920" cy="1700784"/>
           </a:xfrm>
           <a:prstGeom prst="rect">
             <a:avLst/>
@@ -5995,22 +6701,6 @@
             <a:spAutoFit/>
           </a:bodyPr>
           <a:lstStyle/>
-          <a:p>
-            <a:pPr algn="l">
-              <a:spcAft>
-                <a:spcPts val="1000"/>
-              </a:spcAft>
-            </a:pPr>
-            <a:r>
-              <a:rPr sz="2400" b="1">
-                <a:solidFill>
-                  <a:srgbClr val="1E40AF"/>
-                </a:solidFill>
-                <a:latin typeface="Calibri"/>
-              </a:rPr>
-              <a:t>Nội mạng 1 nghìn, ngoại mạng 2 nghìn/phút</a:t>
-            </a:r>
-          </a:p>
           <a:p>
             <a:pPr algn="l" marL="365760" indent="-365760">
               <a:spcAft>
@@ -6029,7 +6719,7 @@
                 </a:solidFill>
                 <a:latin typeface="Calibri"/>
               </a:rPr>
-              <a:t>Tổng tiền dưới 200 nghìn đồng</a:t>
+              <a:t>Hỏi AI: miền nghiệm x − 3y &gt; −3</a:t>
             </a:r>
           </a:p>
           <a:p>
@@ -6050,7 +6740,23 @@
                 </a:solidFill>
                 <a:latin typeface="Calibri"/>
               </a:rPr>
-              <a:t>Ví dụ: M(100; 40) → 180 nghìn</a:t>
+              <a:t>Đối chiếu với hình vẽ tay</a:t>
+            </a:r>
+          </a:p>
+          <a:p>
+            <a:pPr algn="l">
+              <a:spcAft>
+                <a:spcPts val="1000"/>
+              </a:spcAft>
+            </a:pPr>
+            <a:r>
+              <a:rPr sz="2400" b="1">
+                <a:solidFill>
+                  <a:srgbClr val="1E40AF"/>
+                </a:solidFill>
+                <a:latin typeface="Calibri"/>
+              </a:rPr>
+              <a:t>Gợi mở: Tìm bước sai, giải thích, sửa lại</a:t>
             </a:r>
           </a:p>
         </p:txBody>
@@ -6063,21 +6769,17 @@
         </p:nvSpPr>
         <p:spPr>
           <a:xfrm>
-            <a:off x="731520" y="3346704"/>
-            <a:ext cx="6400800" cy="685800"/>
+            <a:off x="10701223" y="457200"/>
+            <a:ext cx="941832" cy="457200"/>
           </a:xfrm>
           <a:prstGeom prst="roundRect">
-            <a:avLst>
-              <a:gd name="adj" fmla="val 8000"/>
-            </a:avLst>
+            <a:avLst/>
           </a:prstGeom>
           <a:solidFill>
-            <a:srgbClr val="FEF2F2"/>
+            <a:srgbClr val="1E40AF"/>
           </a:solidFill>
-          <a:ln w="19050">
-            <a:solidFill>
-              <a:srgbClr val="991B1B"/>
-            </a:solidFill>
+          <a:ln>
+            <a:noFill/>
           </a:ln>
           <a:effectLst/>
         </p:spPr>
@@ -6096,76 +6798,22 @@
           </a:fontRef>
         </p:style>
         <p:txBody>
-          <a:bodyPr rtlCol="0" anchor="ctr"/>
+          <a:bodyPr rtlCol="0" anchor="ctr" tIns="0" bIns="0"/>
           <a:lstStyle/>
           <a:p>
             <a:pPr algn="ctr"/>
-          </a:p>
-        </p:txBody>
-      </p:sp>
-      <p:sp>
-        <p:nvSpPr>
-          <p:cNvPr id="8" name="TextBox 7"/>
-          <p:cNvSpPr txBox="1"/>
-          <p:nvPr/>
-        </p:nvSpPr>
-        <p:spPr>
-          <a:xfrm>
-            <a:off x="914400" y="3346704"/>
-            <a:ext cx="6035040" cy="685800"/>
-          </a:xfrm>
-          <a:prstGeom prst="rect">
-            <a:avLst/>
-          </a:prstGeom>
-          <a:noFill/>
-        </p:spPr>
-        <p:txBody>
-          <a:bodyPr wrap="square" anchor="ctr">
-            <a:spAutoFit/>
-          </a:bodyPr>
-          <a:lstStyle/>
-          <a:p>
-            <a:pPr algn="l">
-              <a:spcAft>
-                <a:spcPts val="400"/>
-              </a:spcAft>
-            </a:pPr>
-            <a:r>
-              <a:rPr sz="2400" b="1">
-                <a:solidFill>
-                  <a:srgbClr val="991B1B"/>
-                </a:solidFill>
-                <a:latin typeface="Calibri"/>
-              </a:rPr>
-              <a:t>x + 2y &lt; 200,  x ≥ 0,  y ≥ 0</a:t>
-            </a:r>
-          </a:p>
-        </p:txBody>
-      </p:sp>
-      <p:pic>
-        <p:nvPicPr>
-          <p:cNvPr id="9" name="Picture 8" descr="rId16.png"/>
-          <p:cNvPicPr>
-            <a:picLocks noChangeAspect="1"/>
-          </p:cNvPicPr>
-          <p:nvPr/>
-        </p:nvPicPr>
-        <p:blipFill>
-          <a:blip r:embed="rId2"/>
-          <a:stretch>
-            <a:fillRect/>
-          </a:stretch>
-        </p:blipFill>
-        <p:spPr>
-          <a:xfrm>
-            <a:off x="7406640" y="1941241"/>
-            <a:ext cx="4389120" cy="3752757"/>
-          </a:xfrm>
-          <a:prstGeom prst="rect">
-            <a:avLst/>
-          </a:prstGeom>
-        </p:spPr>
-      </p:pic>
+            <a:r>
+              <a:rPr sz="1400" b="1">
+                <a:solidFill>
+                  <a:srgbClr val="FFFFFF"/>
+                </a:solidFill>
+                <a:latin typeface="Arial"/>
+              </a:rPr>
+              <a:t>ĐỀ BÀI</a:t>
+            </a:r>
+          </a:p>
+        </p:txBody>
+      </p:sp>
     </p:spTree>
   </p:cSld>
   <p:clrMapOvr>
@@ -6245,7 +6893,7 @@
         <p:spPr>
           <a:xfrm>
             <a:off x="731520" y="274320"/>
-            <a:ext cx="10972800" cy="868680"/>
+            <a:ext cx="9610344" cy="868680"/>
           </a:xfrm>
           <a:prstGeom prst="rect">
             <a:avLst/>
@@ -6265,7 +6913,7 @@
                 </a:solidFill>
                 <a:latin typeface="Arial"/>
               </a:rPr>
-              <a:t>TRẠM KIỂM CHỨNG AI – LỜI GIẢI</a:t>
+              <a:t>TRẠM KIỂM CHỨNG AI</a:t>
             </a:r>
           </a:p>
         </p:txBody>
@@ -6534,6 +7182,59 @@
                 <a:latin typeface="Calibri"/>
               </a:rPr>
               <a:t>Hỏi AI: x − 3y &gt; −3, rồi kiểm chứng</a:t>
+            </a:r>
+          </a:p>
+        </p:txBody>
+      </p:sp>
+      <p:sp>
+        <p:nvSpPr>
+          <p:cNvPr id="9" name="Rounded Rectangle 8"/>
+          <p:cNvSpPr/>
+          <p:nvPr/>
+        </p:nvSpPr>
+        <p:spPr>
+          <a:xfrm>
+            <a:off x="10463479" y="457200"/>
+            <a:ext cx="1179576" cy="457200"/>
+          </a:xfrm>
+          <a:prstGeom prst="roundRect">
+            <a:avLst/>
+          </a:prstGeom>
+          <a:solidFill>
+            <a:srgbClr val="166534"/>
+          </a:solidFill>
+          <a:ln>
+            <a:noFill/>
+          </a:ln>
+          <a:effectLst/>
+        </p:spPr>
+        <p:style>
+          <a:lnRef idx="1">
+            <a:schemeClr val="accent1"/>
+          </a:lnRef>
+          <a:fillRef idx="3">
+            <a:schemeClr val="accent1"/>
+          </a:fillRef>
+          <a:effectRef idx="2">
+            <a:schemeClr val="accent1"/>
+          </a:effectRef>
+          <a:fontRef idx="minor">
+            <a:schemeClr val="lt1"/>
+          </a:fontRef>
+        </p:style>
+        <p:txBody>
+          <a:bodyPr rtlCol="0" anchor="ctr" tIns="0" bIns="0"/>
+          <a:lstStyle/>
+          <a:p>
+            <a:pPr algn="ctr"/>
+            <a:r>
+              <a:rPr sz="1400" b="1">
+                <a:solidFill>
+                  <a:srgbClr val="FFFFFF"/>
+                </a:solidFill>
+                <a:latin typeface="Arial"/>
+              </a:rPr>
+              <a:t>LỜI GIẢI</a:t>
             </a:r>
           </a:p>
         </p:txBody>
@@ -6949,7 +7650,7 @@
         <p:spPr>
           <a:xfrm>
             <a:off x="731520" y="274320"/>
-            <a:ext cx="10972800" cy="868680"/>
+            <a:ext cx="9848088" cy="868680"/>
           </a:xfrm>
           <a:prstGeom prst="rect">
             <a:avLst/>
@@ -6969,7 +7670,7 @@
                 </a:solidFill>
                 <a:latin typeface="Arial"/>
               </a:rPr>
-              <a:t>GIẢI BÀI TOÁN MỞ ĐẦU – LỜI GIẢI</a:t>
+              <a:t>VẬN DỤNG: CƯỚC ĐIỆN THOẠI</a:t>
             </a:r>
           </a:p>
         </p:txBody>
@@ -7048,7 +7749,7 @@
                 </a:solidFill>
                 <a:latin typeface="Calibri"/>
               </a:rPr>
-              <a:t>Toán 10 · Bài 3. Bất phương trình bậc nhất hai ẩn          16</a:t>
+              <a:t>Toán 10 · Bài 3. Bất phương trình bậc nhất hai ẩn          20</a:t>
             </a:r>
           </a:p>
         </p:txBody>
@@ -7062,7 +7763,7 @@
         <p:spPr>
           <a:xfrm>
             <a:off x="731520" y="1508760"/>
-            <a:ext cx="6400800" cy="1700784"/>
+            <a:ext cx="10789920" cy="2834640"/>
           </a:xfrm>
           <a:prstGeom prst="rect">
             <a:avLst/>
@@ -7074,22 +7775,6 @@
             <a:spAutoFit/>
           </a:bodyPr>
           <a:lstStyle/>
-          <a:p>
-            <a:pPr algn="l">
-              <a:spcAft>
-                <a:spcPts val="1000"/>
-              </a:spcAft>
-            </a:pPr>
-            <a:r>
-              <a:rPr sz="2400" b="1">
-                <a:solidFill>
-                  <a:srgbClr val="1E40AF"/>
-                </a:solidFill>
-                <a:latin typeface="Calibri"/>
-              </a:rPr>
-              <a:t>50x + 100y &lt; 20 000 ⇔ x + 2y &lt; 400</a:t>
-            </a:r>
-          </a:p>
           <a:p>
             <a:pPr algn="l" marL="365760" indent="-365760">
               <a:spcAft>
@@ -7108,7 +7793,7 @@
                 </a:solidFill>
                 <a:latin typeface="Calibri"/>
               </a:rPr>
-              <a:t>Trên đoạn AB: hòa vốn</a:t>
+              <a:t>Nội mạng 1 nghìn, ngoại mạng 2 nghìn/phút</a:t>
             </a:r>
           </a:p>
           <a:p>
@@ -7129,7 +7814,70 @@
                 </a:solidFill>
                 <a:latin typeface="Calibri"/>
               </a:rPr>
-              <a:t>(150; 150): có lãi</a:t>
+              <a:t>Tổng tiền dưới 200 nghìn đồng</a:t>
+            </a:r>
+          </a:p>
+          <a:p>
+            <a:pPr algn="l" marL="365760" indent="-365760">
+              <a:spcAft>
+                <a:spcPts val="1000"/>
+              </a:spcAft>
+              <a:buClr>
+                <a:srgbClr val="1E40AF"/>
+              </a:buClr>
+              <a:buFont typeface="Arial"/>
+              <a:buChar char="•"/>
+            </a:pPr>
+            <a:r>
+              <a:rPr sz="2400">
+                <a:solidFill>
+                  <a:srgbClr val="1E293B"/>
+                </a:solidFill>
+                <a:latin typeface="Calibri"/>
+              </a:rPr>
+              <a:t>a) Lập bất phương trình</a:t>
+            </a:r>
+          </a:p>
+          <a:p>
+            <a:pPr algn="l" marL="365760" indent="-365760">
+              <a:spcAft>
+                <a:spcPts val="1000"/>
+              </a:spcAft>
+              <a:buClr>
+                <a:srgbClr val="1E40AF"/>
+              </a:buClr>
+              <a:buFont typeface="Arial"/>
+              <a:buChar char="•"/>
+            </a:pPr>
+            <a:r>
+              <a:rPr sz="2400">
+                <a:solidFill>
+                  <a:srgbClr val="1E293B"/>
+                </a:solidFill>
+                <a:latin typeface="Calibri"/>
+              </a:rPr>
+              <a:t>b) Biểu diễn miền nghiệm</a:t>
+            </a:r>
+          </a:p>
+          <a:p>
+            <a:pPr algn="l" marL="365760" indent="-365760">
+              <a:spcAft>
+                <a:spcPts val="1000"/>
+              </a:spcAft>
+              <a:buClr>
+                <a:srgbClr val="1E40AF"/>
+              </a:buClr>
+              <a:buFont typeface="Arial"/>
+              <a:buChar char="•"/>
+            </a:pPr>
+            <a:r>
+              <a:rPr sz="2400">
+                <a:solidFill>
+                  <a:srgbClr val="1E293B"/>
+                </a:solidFill>
+                <a:latin typeface="Calibri"/>
+              </a:rPr>
+              <a:t>c) Gọi 100 phút nội, 40 phút ngoại?</a:t>
             </a:r>
           </a:p>
         </p:txBody>
@@ -7142,21 +7890,17 @@
         </p:nvSpPr>
         <p:spPr>
           <a:xfrm>
-            <a:off x="731520" y="3346704"/>
-            <a:ext cx="6400800" cy="685800"/>
+            <a:off x="10701223" y="457200"/>
+            <a:ext cx="941832" cy="457200"/>
           </a:xfrm>
           <a:prstGeom prst="roundRect">
-            <a:avLst>
-              <a:gd name="adj" fmla="val 8000"/>
-            </a:avLst>
+            <a:avLst/>
           </a:prstGeom>
           <a:solidFill>
-            <a:srgbClr val="FEF2F2"/>
+            <a:srgbClr val="1E40AF"/>
           </a:solidFill>
-          <a:ln w="19050">
-            <a:solidFill>
-              <a:srgbClr val="991B1B"/>
-            </a:solidFill>
+          <a:ln>
+            <a:noFill/>
           </a:ln>
           <a:effectLst/>
         </p:spPr>
@@ -7175,76 +7919,22 @@
           </a:fontRef>
         </p:style>
         <p:txBody>
-          <a:bodyPr rtlCol="0" anchor="ctr"/>
+          <a:bodyPr rtlCol="0" anchor="ctr" tIns="0" bIns="0"/>
           <a:lstStyle/>
           <a:p>
             <a:pPr algn="ctr"/>
-          </a:p>
-        </p:txBody>
-      </p:sp>
-      <p:sp>
-        <p:nvSpPr>
-          <p:cNvPr id="8" name="TextBox 7"/>
-          <p:cNvSpPr txBox="1"/>
-          <p:nvPr/>
-        </p:nvSpPr>
-        <p:spPr>
-          <a:xfrm>
-            <a:off x="914400" y="3346704"/>
-            <a:ext cx="6035040" cy="685800"/>
-          </a:xfrm>
-          <a:prstGeom prst="rect">
-            <a:avLst/>
-          </a:prstGeom>
-          <a:noFill/>
-        </p:spPr>
-        <p:txBody>
-          <a:bodyPr wrap="square" anchor="ctr">
-            <a:spAutoFit/>
-          </a:bodyPr>
-          <a:lstStyle/>
-          <a:p>
-            <a:pPr algn="l">
-              <a:spcAft>
-                <a:spcPts val="400"/>
-              </a:spcAft>
-            </a:pPr>
-            <a:r>
-              <a:rPr sz="2400" b="1">
-                <a:solidFill>
-                  <a:srgbClr val="991B1B"/>
-                </a:solidFill>
-                <a:latin typeface="Calibri"/>
-              </a:rPr>
-              <a:t>Trong tam giác, bỏ AB: bù lỗ</a:t>
-            </a:r>
-          </a:p>
-        </p:txBody>
-      </p:sp>
-      <p:pic>
-        <p:nvPicPr>
-          <p:cNvPr id="9" name="Picture 8" descr="rId14.png"/>
-          <p:cNvPicPr>
-            <a:picLocks noChangeAspect="1"/>
-          </p:cNvPicPr>
-          <p:nvPr/>
-        </p:nvPicPr>
-        <p:blipFill>
-          <a:blip r:embed="rId2"/>
-          <a:stretch>
-            <a:fillRect/>
-          </a:stretch>
-        </p:blipFill>
-        <p:spPr>
-          <a:xfrm>
-            <a:off x="7406640" y="2372868"/>
-            <a:ext cx="4389120" cy="2889504"/>
-          </a:xfrm>
-          <a:prstGeom prst="rect">
-            <a:avLst/>
-          </a:prstGeom>
-        </p:spPr>
-      </p:pic>
+            <a:r>
+              <a:rPr sz="1400" b="1">
+                <a:solidFill>
+                  <a:srgbClr val="FFFFFF"/>
+                </a:solidFill>
+                <a:latin typeface="Arial"/>
+              </a:rPr>
+              <a:t>ĐỀ BÀI</a:t>
+            </a:r>
+          </a:p>
+        </p:txBody>
+      </p:sp>
     </p:spTree>
   </p:cSld>
   <p:clrMapOvr>
@@ -7324,7 +8014,7 @@
         <p:spPr>
           <a:xfrm>
             <a:off x="731520" y="274320"/>
-            <a:ext cx="10972800" cy="868680"/>
+            <a:ext cx="9610344" cy="868680"/>
           </a:xfrm>
           <a:prstGeom prst="rect">
             <a:avLst/>
@@ -7344,7 +8034,7 @@
                 </a:solidFill>
                 <a:latin typeface="Arial"/>
               </a:rPr>
-              <a:t>LUYỆN TẬP 2 – LỜI GIẢI</a:t>
+              <a:t>VẬN DỤNG: CƯỚC ĐIỆN THOẠI</a:t>
             </a:r>
           </a:p>
         </p:txBody>
@@ -7423,7 +8113,7 @@
                 </a:solidFill>
                 <a:latin typeface="Calibri"/>
               </a:rPr>
-              <a:t>Toán 10 · Bài 3. Bất phương trình bậc nhất hai ẩn          14</a:t>
+              <a:t>Toán 10 · Bài 3. Bất phương trình bậc nhất hai ẩn          21</a:t>
             </a:r>
           </a:p>
         </p:txBody>
@@ -7462,7 +8152,7 @@
                 </a:solidFill>
                 <a:latin typeface="Calibri"/>
               </a:rPr>
-              <a:t>Luyện tập 2: 2x + y &lt; 200</a:t>
+              <a:t>Nội mạng 1 nghìn, ngoại mạng 2 nghìn/phút</a:t>
             </a:r>
           </a:p>
           <a:p>
@@ -7483,7 +8173,7 @@
                 </a:solidFill>
                 <a:latin typeface="Calibri"/>
               </a:rPr>
-              <a:t>d qua (100; 0) và (0; 200)</a:t>
+              <a:t>Tổng tiền dưới 200 nghìn đồng</a:t>
             </a:r>
           </a:p>
           <a:p>
@@ -7504,7 +8194,7 @@
                 </a:solidFill>
                 <a:latin typeface="Calibri"/>
               </a:rPr>
-              <a:t>O: 0 &lt; 200 → giữ nửa chứa O</a:t>
+              <a:t>Ví dụ: M(100; 40) → 180 nghìn</a:t>
             </a:r>
           </a:p>
         </p:txBody>
@@ -7518,7 +8208,7 @@
         <p:spPr>
           <a:xfrm>
             <a:off x="731520" y="3346704"/>
-            <a:ext cx="6400800" cy="1143000"/>
+            <a:ext cx="6400800" cy="685800"/>
           </a:xfrm>
           <a:prstGeom prst="roundRect">
             <a:avLst>
@@ -7566,7 +8256,7 @@
         <p:spPr>
           <a:xfrm>
             <a:off x="914400" y="3346704"/>
-            <a:ext cx="6035040" cy="1143000"/>
+            <a:ext cx="6035040" cy="685800"/>
           </a:xfrm>
           <a:prstGeom prst="rect">
             <a:avLst/>
@@ -7591,30 +8281,14 @@
                 </a:solidFill>
                 <a:latin typeface="Calibri"/>
               </a:rPr>
-              <a:t>&lt;, &gt; : bỏ bờ, vẽ nét đứt</a:t>
-            </a:r>
-          </a:p>
-          <a:p>
-            <a:pPr algn="l">
-              <a:spcAft>
-                <a:spcPts val="400"/>
-              </a:spcAft>
-            </a:pPr>
-            <a:r>
-              <a:rPr sz="2400" b="1">
-                <a:solidFill>
-                  <a:srgbClr val="991B1B"/>
-                </a:solidFill>
-                <a:latin typeface="Calibri"/>
-              </a:rPr>
-              <a:t>≤, ≥ : kể bờ, vẽ nét liền</a:t>
+              <a:t>x + 2y &lt; 200,  x ≥ 0,  y ≥ 0</a:t>
             </a:r>
           </a:p>
         </p:txBody>
       </p:sp>
       <p:pic>
         <p:nvPicPr>
-          <p:cNvPr id="9" name="Picture 8" descr="rId15.png"/>
+          <p:cNvPr id="9" name="Picture 8" descr="rId16.png"/>
           <p:cNvPicPr>
             <a:picLocks noChangeAspect="1"/>
           </p:cNvPicPr>
@@ -7636,6 +8310,59 @@
           </a:prstGeom>
         </p:spPr>
       </p:pic>
+      <p:sp>
+        <p:nvSpPr>
+          <p:cNvPr id="10" name="Rounded Rectangle 9"/>
+          <p:cNvSpPr/>
+          <p:nvPr/>
+        </p:nvSpPr>
+        <p:spPr>
+          <a:xfrm>
+            <a:off x="10463479" y="457200"/>
+            <a:ext cx="1179576" cy="457200"/>
+          </a:xfrm>
+          <a:prstGeom prst="roundRect">
+            <a:avLst/>
+          </a:prstGeom>
+          <a:solidFill>
+            <a:srgbClr val="166534"/>
+          </a:solidFill>
+          <a:ln>
+            <a:noFill/>
+          </a:ln>
+          <a:effectLst/>
+        </p:spPr>
+        <p:style>
+          <a:lnRef idx="1">
+            <a:schemeClr val="accent1"/>
+          </a:lnRef>
+          <a:fillRef idx="3">
+            <a:schemeClr val="accent1"/>
+          </a:fillRef>
+          <a:effectRef idx="2">
+            <a:schemeClr val="accent1"/>
+          </a:effectRef>
+          <a:fontRef idx="minor">
+            <a:schemeClr val="lt1"/>
+          </a:fontRef>
+        </p:style>
+        <p:txBody>
+          <a:bodyPr rtlCol="0" anchor="ctr" tIns="0" bIns="0"/>
+          <a:lstStyle/>
+          <a:p>
+            <a:pPr algn="ctr"/>
+            <a:r>
+              <a:rPr sz="1400" b="1">
+                <a:solidFill>
+                  <a:srgbClr val="FFFFFF"/>
+                </a:solidFill>
+                <a:latin typeface="Arial"/>
+              </a:rPr>
+              <a:t>LỜI GIẢI</a:t>
+            </a:r>
+          </a:p>
+        </p:txBody>
+      </p:sp>
     </p:spTree>
   </p:cSld>
   <p:clrMapOvr>
@@ -7735,7 +8462,7 @@
                 </a:solidFill>
                 <a:latin typeface="Arial"/>
               </a:rPr>
-              <a:t>VÍ DỤ 4 – LỜI GIẢI</a:t>
+              <a:t>VỀ NHÀ: CHI TIÊU TRONG NGÂN SÁCH</a:t>
             </a:r>
           </a:p>
         </p:txBody>
@@ -7814,7 +8541,7 @@
                 </a:solidFill>
                 <a:latin typeface="Calibri"/>
               </a:rPr>
-              <a:t>Toán 10 · Bài 3. Bất phương trình bậc nhất hai ẩn          12</a:t>
+              <a:t>Toán 10 · Bài 3. Bất phương trình bậc nhất hai ẩn          22</a:t>
             </a:r>
           </a:p>
         </p:txBody>
@@ -7828,7 +8555,7 @@
         <p:spPr>
           <a:xfrm>
             <a:off x="731520" y="1508760"/>
-            <a:ext cx="6400800" cy="2267712"/>
+            <a:ext cx="10789920" cy="3401568"/>
           </a:xfrm>
           <a:prstGeom prst="rect">
             <a:avLst/>
@@ -7840,22 +8567,6 @@
             <a:spAutoFit/>
           </a:bodyPr>
           <a:lstStyle/>
-          <a:p>
-            <a:pPr algn="l">
-              <a:spcAft>
-                <a:spcPts val="1000"/>
-              </a:spcAft>
-            </a:pPr>
-            <a:r>
-              <a:rPr sz="2400" b="1">
-                <a:solidFill>
-                  <a:srgbClr val="1E40AF"/>
-                </a:solidFill>
-                <a:latin typeface="Calibri"/>
-              </a:rPr>
-              <a:t>Biểu diễn miền nghiệm: 5x − 7y ≤ 0</a:t>
-            </a:r>
-          </a:p>
           <a:p>
             <a:pPr algn="l" marL="365760" indent="-365760">
               <a:spcAft>
@@ -7874,7 +8585,7 @@
                 </a:solidFill>
                 <a:latin typeface="Calibri"/>
               </a:rPr>
-              <a:t>c = 0 nên O nằm trên d</a:t>
+              <a:t>Chọn tình huống ở gia đình, địa phương</a:t>
             </a:r>
           </a:p>
           <a:p>
@@ -7895,25 +8606,7 @@
                 </a:solidFill>
                 <a:latin typeface="Calibri"/>
               </a:rPr>
-              <a:t>Không thử O; chọn M</a:t>
-            </a:r>
-            <a:r>
-              <a:rPr sz="2400" baseline="-25000">
-                <a:solidFill>
-                  <a:srgbClr val="1E293B"/>
-                </a:solidFill>
-                <a:latin typeface="Calibri"/>
-              </a:rPr>
-              <a:t>0</a:t>
-            </a:r>
-            <a:r>
-              <a:rPr sz="2400">
-                <a:solidFill>
-                  <a:srgbClr val="1E293B"/>
-                </a:solidFill>
-                <a:latin typeface="Calibri"/>
-              </a:rPr>
-              <a:t>(0; 1)</a:t>
+              <a:t>Ví dụ: mua phân bón cà phê</a:t>
             </a:r>
           </a:p>
           <a:p>
@@ -7934,131 +8627,74 @@
                 </a:solidFill>
                 <a:latin typeface="Calibri"/>
               </a:rPr>
-              <a:t>5·0 − 7·1 = −7 &lt; 0: đúng</a:t>
-            </a:r>
-          </a:p>
-        </p:txBody>
-      </p:sp>
-      <p:sp>
-        <p:nvSpPr>
-          <p:cNvPr id="7" name="Rounded Rectangle 6"/>
-          <p:cNvSpPr/>
-          <p:nvPr/>
-        </p:nvSpPr>
-        <p:spPr>
-          <a:xfrm>
-            <a:off x="731520" y="3913632"/>
-            <a:ext cx="6400800" cy="685800"/>
-          </a:xfrm>
-          <a:prstGeom prst="roundRect">
-            <a:avLst>
-              <a:gd name="adj" fmla="val 8000"/>
-            </a:avLst>
-          </a:prstGeom>
-          <a:solidFill>
-            <a:srgbClr val="FEF2F2"/>
-          </a:solidFill>
-          <a:ln w="19050">
-            <a:solidFill>
-              <a:srgbClr val="991B1B"/>
-            </a:solidFill>
-          </a:ln>
-          <a:effectLst/>
-        </p:spPr>
-        <p:style>
-          <a:lnRef idx="1">
-            <a:schemeClr val="accent1"/>
-          </a:lnRef>
-          <a:fillRef idx="3">
-            <a:schemeClr val="accent1"/>
-          </a:fillRef>
-          <a:effectRef idx="2">
-            <a:schemeClr val="accent1"/>
-          </a:effectRef>
-          <a:fontRef idx="minor">
-            <a:schemeClr val="lt1"/>
-          </a:fontRef>
-        </p:style>
-        <p:txBody>
-          <a:bodyPr rtlCol="0" anchor="ctr"/>
-          <a:lstStyle/>
-          <a:p>
-            <a:pPr algn="ctr"/>
-          </a:p>
-        </p:txBody>
-      </p:sp>
-      <p:sp>
-        <p:nvSpPr>
-          <p:cNvPr id="8" name="TextBox 7"/>
-          <p:cNvSpPr txBox="1"/>
-          <p:nvPr/>
-        </p:nvSpPr>
-        <p:spPr>
-          <a:xfrm>
-            <a:off x="914400" y="3913632"/>
-            <a:ext cx="6035040" cy="685800"/>
-          </a:xfrm>
-          <a:prstGeom prst="rect">
-            <a:avLst/>
-          </a:prstGeom>
-          <a:noFill/>
-        </p:spPr>
-        <p:txBody>
-          <a:bodyPr wrap="square" anchor="ctr">
-            <a:spAutoFit/>
-          </a:bodyPr>
-          <a:lstStyle/>
-          <a:p>
-            <a:pPr algn="l">
+              <a:t>Tìm giá thực tế, ghi nguồn</a:t>
+            </a:r>
+          </a:p>
+          <a:p>
+            <a:pPr algn="l" marL="365760" indent="-365760">
               <a:spcAft>
-                <a:spcPts val="400"/>
+                <a:spcPts val="1000"/>
               </a:spcAft>
+              <a:buClr>
+                <a:srgbClr val="1E40AF"/>
+              </a:buClr>
+              <a:buFont typeface="Arial"/>
+              <a:buChar char="•"/>
             </a:pPr>
             <a:r>
-              <a:rPr sz="2400" b="1">
-                <a:solidFill>
-                  <a:srgbClr val="991B1B"/>
-                </a:solidFill>
-                <a:latin typeface="Calibri"/>
-              </a:rPr>
-              <a:t>Miền nghiệm: nửa chứa M</a:t>
-            </a:r>
-            <a:r>
-              <a:rPr sz="2400" b="1" baseline="-25000">
-                <a:solidFill>
-                  <a:srgbClr val="991B1B"/>
-                </a:solidFill>
-                <a:latin typeface="Calibri"/>
-              </a:rPr>
-              <a:t>0</a:t>
-            </a:r>
-          </a:p>
-        </p:txBody>
-      </p:sp>
-      <p:pic>
-        <p:nvPicPr>
-          <p:cNvPr id="9" name="Picture 8" descr="rId13.png"/>
-          <p:cNvPicPr>
-            <a:picLocks noChangeAspect="1"/>
-          </p:cNvPicPr>
-          <p:nvPr/>
-        </p:nvPicPr>
-        <p:blipFill>
-          <a:blip r:embed="rId2"/>
-          <a:stretch>
-            <a:fillRect/>
-          </a:stretch>
-        </p:blipFill>
-        <p:spPr>
-          <a:xfrm>
-            <a:off x="7406640" y="1819003"/>
-            <a:ext cx="4389120" cy="3997234"/>
-          </a:xfrm>
-          <a:prstGeom prst="rect">
-            <a:avLst/>
-          </a:prstGeom>
-        </p:spPr>
-      </p:pic>
+              <a:rPr sz="2400">
+                <a:solidFill>
+                  <a:srgbClr val="1E293B"/>
+                </a:solidFill>
+                <a:latin typeface="Calibri"/>
+              </a:rPr>
+              <a:t>Lập BPT, vẽ miền nghiệm GeoGebra</a:t>
+            </a:r>
+          </a:p>
+          <a:p>
+            <a:pPr algn="l" marL="365760" indent="-365760">
+              <a:spcAft>
+                <a:spcPts val="1000"/>
+              </a:spcAft>
+              <a:buClr>
+                <a:srgbClr val="1E40AF"/>
+              </a:buClr>
+              <a:buFont typeface="Arial"/>
+              <a:buChar char="•"/>
+            </a:pPr>
+            <a:r>
+              <a:rPr sz="2400">
+                <a:solidFill>
+                  <a:srgbClr val="1E293B"/>
+                </a:solidFill>
+                <a:latin typeface="Calibri"/>
+              </a:rPr>
+              <a:t>Đề xuất 3 phương án mua</a:t>
+            </a:r>
+          </a:p>
+          <a:p>
+            <a:pPr algn="l" marL="365760" indent="-365760">
+              <a:spcAft>
+                <a:spcPts val="1000"/>
+              </a:spcAft>
+              <a:buClr>
+                <a:srgbClr val="1E40AF"/>
+              </a:buClr>
+              <a:buFont typeface="Arial"/>
+              <a:buChar char="•"/>
+            </a:pPr>
+            <a:r>
+              <a:rPr sz="2400">
+                <a:solidFill>
+                  <a:srgbClr val="1E293B"/>
+                </a:solidFill>
+                <a:latin typeface="Calibri"/>
+              </a:rPr>
+              <a:t>Nộp 3–5 slide kèm Nhật ký AI</a:t>
+            </a:r>
+          </a:p>
+        </p:txBody>
+      </p:sp>
     </p:spTree>
   </p:cSld>
   <p:clrMapOvr>
@@ -8158,7 +8794,7 @@
                 </a:solidFill>
                 <a:latin typeface="Arial"/>
               </a:rPr>
-              <a:t>VÍ DỤ 3 – LỜI GIẢI</a:t>
+              <a:t>SƠ ĐỒ TƯ DUY BÀI HỌC</a:t>
             </a:r>
           </a:p>
         </p:txBody>
@@ -8237,203 +8873,14 @@
                 </a:solidFill>
                 <a:latin typeface="Calibri"/>
               </a:rPr>
-              <a:t>Toán 10 · Bài 3. Bất phương trình bậc nhất hai ẩn          10</a:t>
-            </a:r>
-          </a:p>
-        </p:txBody>
-      </p:sp>
-      <p:sp>
-        <p:nvSpPr>
-          <p:cNvPr id="6" name="TextBox 5"/>
-          <p:cNvSpPr txBox="1"/>
-          <p:nvPr/>
-        </p:nvSpPr>
-        <p:spPr>
-          <a:xfrm>
-            <a:off x="731520" y="1508760"/>
-            <a:ext cx="6400800" cy="2267712"/>
-          </a:xfrm>
-          <a:prstGeom prst="rect">
-            <a:avLst/>
-          </a:prstGeom>
-          <a:noFill/>
-        </p:spPr>
-        <p:txBody>
-          <a:bodyPr wrap="square" anchor="t">
-            <a:spAutoFit/>
-          </a:bodyPr>
-          <a:lstStyle/>
-          <a:p>
-            <a:pPr algn="l">
-              <a:spcAft>
-                <a:spcPts val="1000"/>
-              </a:spcAft>
-            </a:pPr>
-            <a:r>
-              <a:rPr sz="2400" b="1">
-                <a:solidFill>
-                  <a:srgbClr val="1E40AF"/>
-                </a:solidFill>
-                <a:latin typeface="Calibri"/>
-              </a:rPr>
-              <a:t>Biểu diễn miền nghiệm: x + y ≥ 100</a:t>
-            </a:r>
-          </a:p>
-          <a:p>
-            <a:pPr algn="l" marL="365760" indent="-365760">
-              <a:spcAft>
-                <a:spcPts val="1000"/>
-              </a:spcAft>
-              <a:buClr>
-                <a:srgbClr val="1E40AF"/>
-              </a:buClr>
-              <a:buFont typeface="Arial"/>
-              <a:buChar char="•"/>
-            </a:pPr>
-            <a:r>
-              <a:rPr sz="2400">
-                <a:solidFill>
-                  <a:srgbClr val="1E293B"/>
-                </a:solidFill>
-                <a:latin typeface="Calibri"/>
-              </a:rPr>
-              <a:t>d: x + y = 100, nét liền</a:t>
-            </a:r>
-          </a:p>
-          <a:p>
-            <a:pPr algn="l" marL="365760" indent="-365760">
-              <a:spcAft>
-                <a:spcPts val="1000"/>
-              </a:spcAft>
-              <a:buClr>
-                <a:srgbClr val="1E40AF"/>
-              </a:buClr>
-              <a:buFont typeface="Arial"/>
-              <a:buChar char="•"/>
-            </a:pPr>
-            <a:r>
-              <a:rPr sz="2400">
-                <a:solidFill>
-                  <a:srgbClr val="1E293B"/>
-                </a:solidFill>
-                <a:latin typeface="Calibri"/>
-              </a:rPr>
-              <a:t>Thử O(0; 0): 0 ≥ 100 sai</a:t>
-            </a:r>
-          </a:p>
-          <a:p>
-            <a:pPr algn="l" marL="365760" indent="-365760">
-              <a:spcAft>
-                <a:spcPts val="1000"/>
-              </a:spcAft>
-              <a:buClr>
-                <a:srgbClr val="1E40AF"/>
-              </a:buClr>
-              <a:buFont typeface="Arial"/>
-              <a:buChar char="•"/>
-            </a:pPr>
-            <a:r>
-              <a:rPr sz="2400">
-                <a:solidFill>
-                  <a:srgbClr val="1E293B"/>
-                </a:solidFill>
-                <a:latin typeface="Calibri"/>
-              </a:rPr>
-              <a:t>Gạch bỏ nửa chứa O</a:t>
-            </a:r>
-          </a:p>
-        </p:txBody>
-      </p:sp>
-      <p:sp>
-        <p:nvSpPr>
-          <p:cNvPr id="7" name="Rounded Rectangle 6"/>
-          <p:cNvSpPr/>
-          <p:nvPr/>
-        </p:nvSpPr>
-        <p:spPr>
-          <a:xfrm>
-            <a:off x="731520" y="3913632"/>
-            <a:ext cx="6400800" cy="685800"/>
-          </a:xfrm>
-          <a:prstGeom prst="roundRect">
-            <a:avLst>
-              <a:gd name="adj" fmla="val 8000"/>
-            </a:avLst>
-          </a:prstGeom>
-          <a:solidFill>
-            <a:srgbClr val="FEF2F2"/>
-          </a:solidFill>
-          <a:ln w="19050">
-            <a:solidFill>
-              <a:srgbClr val="991B1B"/>
-            </a:solidFill>
-          </a:ln>
-          <a:effectLst/>
-        </p:spPr>
-        <p:style>
-          <a:lnRef idx="1">
-            <a:schemeClr val="accent1"/>
-          </a:lnRef>
-          <a:fillRef idx="3">
-            <a:schemeClr val="accent1"/>
-          </a:fillRef>
-          <a:effectRef idx="2">
-            <a:schemeClr val="accent1"/>
-          </a:effectRef>
-          <a:fontRef idx="minor">
-            <a:schemeClr val="lt1"/>
-          </a:fontRef>
-        </p:style>
-        <p:txBody>
-          <a:bodyPr rtlCol="0" anchor="ctr"/>
-          <a:lstStyle/>
-          <a:p>
-            <a:pPr algn="ctr"/>
-          </a:p>
-        </p:txBody>
-      </p:sp>
-      <p:sp>
-        <p:nvSpPr>
-          <p:cNvPr id="8" name="TextBox 7"/>
-          <p:cNvSpPr txBox="1"/>
-          <p:nvPr/>
-        </p:nvSpPr>
-        <p:spPr>
-          <a:xfrm>
-            <a:off x="914400" y="3913632"/>
-            <a:ext cx="6035040" cy="685800"/>
-          </a:xfrm>
-          <a:prstGeom prst="rect">
-            <a:avLst/>
-          </a:prstGeom>
-          <a:noFill/>
-        </p:spPr>
-        <p:txBody>
-          <a:bodyPr wrap="square" anchor="ctr">
-            <a:spAutoFit/>
-          </a:bodyPr>
-          <a:lstStyle/>
-          <a:p>
-            <a:pPr algn="l">
-              <a:spcAft>
-                <a:spcPts val="400"/>
-              </a:spcAft>
-            </a:pPr>
-            <a:r>
-              <a:rPr sz="2400" b="1">
-                <a:solidFill>
-                  <a:srgbClr val="991B1B"/>
-                </a:solidFill>
-                <a:latin typeface="Calibri"/>
-              </a:rPr>
-              <a:t>Miền nghiệm: nửa không chứa O</a:t>
+              <a:t>Toán 10 · Bài 3. Bất phương trình bậc nhất hai ẩn          23</a:t>
             </a:r>
           </a:p>
         </p:txBody>
       </p:sp>
       <p:pic>
         <p:nvPicPr>
-          <p:cNvPr id="9" name="Picture 8" descr="rId12.png"/>
+          <p:cNvPr id="6" name="Picture 5" descr="rId17.png"/>
           <p:cNvPicPr>
             <a:picLocks noChangeAspect="1"/>
           </p:cNvPicPr>
@@ -8447,8 +8894,8 @@
         </p:blipFill>
         <p:spPr>
           <a:xfrm>
-            <a:off x="7406640" y="1631158"/>
-            <a:ext cx="4389120" cy="4372923"/>
+            <a:off x="2452400" y="1417320"/>
+            <a:ext cx="7256720" cy="4800600"/>
           </a:xfrm>
           <a:prstGeom prst="rect">
             <a:avLst/>
@@ -8554,7 +9001,7 @@
                 </a:solidFill>
                 <a:latin typeface="Arial"/>
               </a:rPr>
-              <a:t>NGHIỆM CỦA BPT – LỜI GIẢI</a:t>
+              <a:t>BÀI TẬP CỦA BẠN</a:t>
             </a:r>
           </a:p>
         </p:txBody>
@@ -8633,21 +9080,91 @@
                 </a:solidFill>
                 <a:latin typeface="Calibri"/>
               </a:rPr>
-              <a:t>Toán 10 · Bài 3. Bất phương trình bậc nhất hai ẩn          6</a:t>
-            </a:r>
-          </a:p>
-        </p:txBody>
-      </p:sp>
-      <p:sp>
-        <p:nvSpPr>
-          <p:cNvPr id="6" name="TextBox 5"/>
+              <a:t>Toán 10 · Bài 3. Bất phương trình bậc nhất hai ẩn          24</a:t>
+            </a:r>
+          </a:p>
+        </p:txBody>
+      </p:sp>
+      <p:sp>
+        <p:nvSpPr>
+          <p:cNvPr id="6" name="Rectangle 5"/>
+          <p:cNvSpPr/>
+          <p:nvPr/>
+        </p:nvSpPr>
+        <p:spPr>
+          <a:xfrm>
+            <a:off x="731520" y="1463040"/>
+            <a:ext cx="4572000" cy="4572000"/>
+          </a:xfrm>
+          <a:prstGeom prst="rect">
+            <a:avLst/>
+          </a:prstGeom>
+          <a:solidFill>
+            <a:srgbClr val="F8FAFC"/>
+          </a:solidFill>
+          <a:ln w="19050">
+            <a:solidFill>
+              <a:srgbClr val="E2E8F0"/>
+            </a:solidFill>
+          </a:ln>
+          <a:effectLst/>
+        </p:spPr>
+        <p:style>
+          <a:lnRef idx="1">
+            <a:schemeClr val="accent1"/>
+          </a:lnRef>
+          <a:fillRef idx="3">
+            <a:schemeClr val="accent1"/>
+          </a:fillRef>
+          <a:effectRef idx="2">
+            <a:schemeClr val="accent1"/>
+          </a:effectRef>
+          <a:fontRef idx="minor">
+            <a:schemeClr val="lt1"/>
+          </a:fontRef>
+        </p:style>
+        <p:txBody>
+          <a:bodyPr rtlCol="0" anchor="ctr"/>
+          <a:lstStyle/>
+          <a:p>
+            <a:pPr algn="ctr"/>
+          </a:p>
+        </p:txBody>
+      </p:sp>
+      <p:pic>
+        <p:nvPicPr>
+          <p:cNvPr id="7" name="Picture 6" descr="QR_CungCo_Bai3_Toan10.png"/>
+          <p:cNvPicPr>
+            <a:picLocks noChangeAspect="1"/>
+          </p:cNvPicPr>
+          <p:nvPr/>
+        </p:nvPicPr>
+        <p:blipFill>
+          <a:blip r:embed="rId2"/>
+          <a:stretch>
+            <a:fillRect/>
+          </a:stretch>
+        </p:blipFill>
+        <p:spPr>
+          <a:xfrm>
+            <a:off x="960120" y="1691640"/>
+            <a:ext cx="4114800" cy="4114800"/>
+          </a:xfrm>
+          <a:prstGeom prst="rect">
+            <a:avLst/>
+          </a:prstGeom>
+        </p:spPr>
+      </p:pic>
+      <p:sp>
+        <p:nvSpPr>
+          <p:cNvPr id="8" name="TextBox 7"/>
           <p:cNvSpPr txBox="1"/>
           <p:nvPr/>
         </p:nvSpPr>
         <p:spPr>
           <a:xfrm>
-            <a:off x="731520" y="1508760"/>
-            <a:ext cx="10789920" cy="1700784"/>
+            <a:off x="5760720" y="1554480"/>
+            <a:ext cx="6035040" cy="3108960"/>
           </a:xfrm>
           <a:prstGeom prst="rect">
             <a:avLst/>
@@ -8659,22 +9176,6 @@
             <a:spAutoFit/>
           </a:bodyPr>
           <a:lstStyle/>
-          <a:p>
-            <a:pPr algn="l">
-              <a:spcAft>
-                <a:spcPts val="1000"/>
-              </a:spcAft>
-            </a:pPr>
-            <a:r>
-              <a:rPr sz="2400" b="1">
-                <a:solidFill>
-                  <a:srgbClr val="1E40AF"/>
-                </a:solidFill>
-                <a:latin typeface="Calibri"/>
-              </a:rPr>
-              <a:t>Ví dụ 2: x + 2y &gt; 5</a:t>
-            </a:r>
-          </a:p>
           <a:p>
             <a:pPr algn="l" marL="365760" indent="-365760">
               <a:spcAft>
@@ -8687,13 +9188,13 @@
               <a:buChar char="•"/>
             </a:pPr>
             <a:r>
-              <a:rPr sz="2400">
+              <a:rPr sz="2600">
                 <a:solidFill>
                   <a:srgbClr val="1E293B"/>
                 </a:solidFill>
                 <a:latin typeface="Calibri"/>
               </a:rPr>
-              <a:t>(3; 4): 3 + 8 = 11 &gt; 5  →  là nghiệm</a:t>
+              <a:t>Quét mã QR bằng điện thoại</a:t>
             </a:r>
           </a:p>
           <a:p>
@@ -8708,75 +9209,69 @@
               <a:buChar char="•"/>
             </a:pPr>
             <a:r>
-              <a:rPr sz="2400">
+              <a:rPr sz="2600">
                 <a:solidFill>
                   <a:srgbClr val="1E293B"/>
                 </a:solidFill>
                 <a:latin typeface="Calibri"/>
               </a:rPr>
-              <a:t>(0; −1): −2 &lt; 5  →  không là nghiệm</a:t>
-            </a:r>
-          </a:p>
-        </p:txBody>
-      </p:sp>
-      <p:sp>
-        <p:nvSpPr>
-          <p:cNvPr id="7" name="Rounded Rectangle 6"/>
-          <p:cNvSpPr/>
-          <p:nvPr/>
-        </p:nvSpPr>
-        <p:spPr>
-          <a:xfrm>
-            <a:off x="731520" y="3346704"/>
-            <a:ext cx="8686800" cy="1143000"/>
-          </a:xfrm>
-          <a:prstGeom prst="roundRect">
-            <a:avLst>
-              <a:gd name="adj" fmla="val 8000"/>
-            </a:avLst>
-          </a:prstGeom>
-          <a:solidFill>
-            <a:srgbClr val="FEF2F2"/>
-          </a:solidFill>
-          <a:ln w="19050">
-            <a:solidFill>
-              <a:srgbClr val="991B1B"/>
-            </a:solidFill>
-          </a:ln>
-          <a:effectLst/>
-        </p:spPr>
-        <p:style>
-          <a:lnRef idx="1">
-            <a:schemeClr val="accent1"/>
-          </a:lnRef>
-          <a:fillRef idx="3">
-            <a:schemeClr val="accent1"/>
-          </a:fillRef>
-          <a:effectRef idx="2">
-            <a:schemeClr val="accent1"/>
-          </a:effectRef>
-          <a:fontRef idx="minor">
-            <a:schemeClr val="lt1"/>
-          </a:fontRef>
-        </p:style>
-        <p:txBody>
-          <a:bodyPr rtlCol="0" anchor="ctr"/>
-          <a:lstStyle/>
-          <a:p>
-            <a:pPr algn="ctr"/>
-          </a:p>
-        </p:txBody>
-      </p:sp>
-      <p:sp>
-        <p:nvSpPr>
-          <p:cNvPr id="8" name="TextBox 7"/>
+              <a:t>Nhập họ tên và lớp</a:t>
+            </a:r>
+          </a:p>
+          <a:p>
+            <a:pPr algn="l" marL="365760" indent="-365760">
+              <a:spcAft>
+                <a:spcPts val="1000"/>
+              </a:spcAft>
+              <a:buClr>
+                <a:srgbClr val="1E40AF"/>
+              </a:buClr>
+              <a:buFont typeface="Arial"/>
+              <a:buChar char="•"/>
+            </a:pPr>
+            <a:r>
+              <a:rPr sz="2600">
+                <a:solidFill>
+                  <a:srgbClr val="1E293B"/>
+                </a:solidFill>
+                <a:latin typeface="Calibri"/>
+              </a:rPr>
+              <a:t>7 câu – làm trong 7 phút</a:t>
+            </a:r>
+          </a:p>
+          <a:p>
+            <a:pPr algn="l" marL="365760" indent="-365760">
+              <a:spcAft>
+                <a:spcPts val="1000"/>
+              </a:spcAft>
+              <a:buClr>
+                <a:srgbClr val="1E40AF"/>
+              </a:buClr>
+              <a:buFont typeface="Arial"/>
+              <a:buChar char="•"/>
+            </a:pPr>
+            <a:r>
+              <a:rPr sz="2600">
+                <a:solidFill>
+                  <a:srgbClr val="1E293B"/>
+                </a:solidFill>
+                <a:latin typeface="Calibri"/>
+              </a:rPr>
+              <a:t>Nộp bài, xem lời giải</a:t>
+            </a:r>
+          </a:p>
+        </p:txBody>
+      </p:sp>
+      <p:sp>
+        <p:nvSpPr>
+          <p:cNvPr id="9" name="TextBox 8"/>
           <p:cNvSpPr txBox="1"/>
           <p:nvPr/>
         </p:nvSpPr>
         <p:spPr>
           <a:xfrm>
-            <a:off x="914400" y="3346704"/>
-            <a:ext cx="8321040" cy="1143000"/>
+            <a:off x="5760720" y="4754880"/>
+            <a:ext cx="6035040" cy="1188720"/>
           </a:xfrm>
           <a:prstGeom prst="rect">
             <a:avLst/>
@@ -8784,112 +9279,25 @@
           <a:noFill/>
         </p:spPr>
         <p:txBody>
-          <a:bodyPr wrap="square" anchor="ctr">
+          <a:bodyPr wrap="square" anchor="t">
             <a:spAutoFit/>
           </a:bodyPr>
           <a:lstStyle/>
           <a:p>
             <a:pPr algn="l">
               <a:spcAft>
-                <a:spcPts val="400"/>
+                <a:spcPts val="1000"/>
               </a:spcAft>
             </a:pPr>
             <a:r>
-              <a:rPr sz="2400" b="1">
-                <a:solidFill>
-                  <a:srgbClr val="991B1B"/>
-                </a:solidFill>
-                <a:latin typeface="Calibri"/>
-              </a:rPr>
-              <a:t>(x</a:t>
-            </a:r>
-            <a:r>
-              <a:rPr sz="2400" b="1" baseline="-25000">
-                <a:solidFill>
-                  <a:srgbClr val="991B1B"/>
-                </a:solidFill>
-                <a:latin typeface="Calibri"/>
-              </a:rPr>
-              <a:t>0</a:t>
-            </a:r>
-            <a:r>
-              <a:rPr sz="2400" b="1">
-                <a:solidFill>
-                  <a:srgbClr val="991B1B"/>
-                </a:solidFill>
-                <a:latin typeface="Calibri"/>
-              </a:rPr>
-              <a:t>; y</a:t>
-            </a:r>
-            <a:r>
-              <a:rPr sz="2400" b="1" baseline="-25000">
-                <a:solidFill>
-                  <a:srgbClr val="991B1B"/>
-                </a:solidFill>
-                <a:latin typeface="Calibri"/>
-              </a:rPr>
-              <a:t>0</a:t>
-            </a:r>
-            <a:r>
-              <a:rPr sz="2400" b="1">
-                <a:solidFill>
-                  <a:srgbClr val="991B1B"/>
-                </a:solidFill>
-                <a:latin typeface="Calibri"/>
-              </a:rPr>
-              <a:t>) là nghiệm nếu ax</a:t>
-            </a:r>
-            <a:r>
-              <a:rPr sz="2400" b="1" baseline="-25000">
-                <a:solidFill>
-                  <a:srgbClr val="991B1B"/>
-                </a:solidFill>
-                <a:latin typeface="Calibri"/>
-              </a:rPr>
-              <a:t>0</a:t>
-            </a:r>
-            <a:r>
-              <a:rPr sz="2400" b="1">
-                <a:solidFill>
-                  <a:srgbClr val="991B1B"/>
-                </a:solidFill>
-                <a:latin typeface="Calibri"/>
-              </a:rPr>
-              <a:t> + by</a:t>
-            </a:r>
-            <a:r>
-              <a:rPr sz="2400" b="1" baseline="-25000">
-                <a:solidFill>
-                  <a:srgbClr val="991B1B"/>
-                </a:solidFill>
-                <a:latin typeface="Calibri"/>
-              </a:rPr>
-              <a:t>0</a:t>
-            </a:r>
-            <a:r>
-              <a:rPr sz="2400" b="1">
-                <a:solidFill>
-                  <a:srgbClr val="991B1B"/>
-                </a:solidFill>
-                <a:latin typeface="Calibri"/>
-              </a:rPr>
-              <a:t> ≤ c đúng</a:t>
-            </a:r>
-          </a:p>
-          <a:p>
-            <a:pPr algn="l">
-              <a:spcAft>
-                <a:spcPts val="400"/>
-              </a:spcAft>
-            </a:pPr>
-            <a:r>
-              <a:rPr sz="2400" b="1">
-                <a:solidFill>
-                  <a:srgbClr val="991B1B"/>
-                </a:solidFill>
-                <a:latin typeface="Calibri"/>
-              </a:rPr>
-              <a:t>Luôn có vô số nghiệm</a:t>
+              <a:rPr sz="1800" b="1">
+                <a:solidFill>
+                  <a:srgbClr val="1E40AF"/>
+                </a:solidFill>
+                <a:latin typeface="Calibri"/>
+                <a:hlinkClick r:id="rId3"/>
+              </a:rPr>
+              <a:t>trangtu66.github.io/Taode_thi_online/cc_bai3_t10.html</a:t>
             </a:r>
           </a:p>
         </p:txBody>
@@ -9720,7 +10128,7 @@
         <p:spPr>
           <a:xfrm>
             <a:off x="731520" y="274320"/>
-            <a:ext cx="10972800" cy="868680"/>
+            <a:ext cx="9848088" cy="868680"/>
           </a:xfrm>
           <a:prstGeom prst="rect">
             <a:avLst/>
@@ -9906,6 +10314,59 @@
                 <a:latin typeface="Calibri"/>
               </a:rPr>
               <a:t>(0; −1) có là nghiệm không?</a:t>
+            </a:r>
+          </a:p>
+        </p:txBody>
+      </p:sp>
+      <p:sp>
+        <p:nvSpPr>
+          <p:cNvPr id="7" name="Rounded Rectangle 6"/>
+          <p:cNvSpPr/>
+          <p:nvPr/>
+        </p:nvSpPr>
+        <p:spPr>
+          <a:xfrm>
+            <a:off x="10701223" y="457200"/>
+            <a:ext cx="941832" cy="457200"/>
+          </a:xfrm>
+          <a:prstGeom prst="roundRect">
+            <a:avLst/>
+          </a:prstGeom>
+          <a:solidFill>
+            <a:srgbClr val="1E40AF"/>
+          </a:solidFill>
+          <a:ln>
+            <a:noFill/>
+          </a:ln>
+          <a:effectLst/>
+        </p:spPr>
+        <p:style>
+          <a:lnRef idx="1">
+            <a:schemeClr val="accent1"/>
+          </a:lnRef>
+          <a:fillRef idx="3">
+            <a:schemeClr val="accent1"/>
+          </a:fillRef>
+          <a:effectRef idx="2">
+            <a:schemeClr val="accent1"/>
+          </a:effectRef>
+          <a:fontRef idx="minor">
+            <a:schemeClr val="lt1"/>
+          </a:fontRef>
+        </p:style>
+        <p:txBody>
+          <a:bodyPr rtlCol="0" anchor="ctr" tIns="0" bIns="0"/>
+          <a:lstStyle/>
+          <a:p>
+            <a:pPr algn="ctr"/>
+            <a:r>
+              <a:rPr sz="1400" b="1">
+                <a:solidFill>
+                  <a:srgbClr val="FFFFFF"/>
+                </a:solidFill>
+                <a:latin typeface="Arial"/>
+              </a:rPr>
+              <a:t>ĐỀ BÀI</a:t>
             </a:r>
           </a:p>
         </p:txBody>
@@ -9989,7 +10450,7 @@
         <p:spPr>
           <a:xfrm>
             <a:off x="731520" y="274320"/>
-            <a:ext cx="10972800" cy="868680"/>
+            <a:ext cx="9610344" cy="868680"/>
           </a:xfrm>
           <a:prstGeom prst="rect">
             <a:avLst/>
@@ -10009,7 +10470,7 @@
                 </a:solidFill>
                 <a:latin typeface="Arial"/>
               </a:rPr>
-              <a:t>PHÁT HIỆN: ĐƯỜNG THẲNG CHIA ĐÔI MẶT PHẲNG</a:t>
+              <a:t>NGHIỆM CỦA BẤT PHƯƠNG TRÌNH</a:t>
             </a:r>
           </a:p>
         </p:txBody>
@@ -10088,7 +10549,7 @@
                 </a:solidFill>
                 <a:latin typeface="Calibri"/>
               </a:rPr>
-              <a:t>Toán 10 · Bài 3. Bất phương trình bậc nhất hai ẩn          7</a:t>
+              <a:t>Toán 10 · Bài 3. Bất phương trình bậc nhất hai ẩn          6</a:t>
             </a:r>
           </a:p>
         </p:txBody>
@@ -10102,7 +10563,7 @@
         <p:spPr>
           <a:xfrm>
             <a:off x="731520" y="1508760"/>
-            <a:ext cx="6400800" cy="1700784"/>
+            <a:ext cx="10789920" cy="1700784"/>
           </a:xfrm>
           <a:prstGeom prst="rect">
             <a:avLst/>
@@ -10127,7 +10588,7 @@
                 </a:solidFill>
                 <a:latin typeface="Calibri"/>
               </a:rPr>
-              <a:t>d: 2x − y = 4</a:t>
+              <a:t>Ví dụ 2: x + 2y &gt; 5</a:t>
             </a:r>
           </a:p>
           <a:p>
@@ -10148,7 +10609,7 @@
                 </a:solidFill>
                 <a:latin typeface="Calibri"/>
               </a:rPr>
-              <a:t>O, A, B:  2x − y &lt; 4</a:t>
+              <a:t>(3; 4): 3 + 8 = 11 &gt; 5  →  là nghiệm</a:t>
             </a:r>
           </a:p>
           <a:p>
@@ -10169,7 +10630,7 @@
                 </a:solidFill>
                 <a:latin typeface="Calibri"/>
               </a:rPr>
-              <a:t>C, D:  2x − y &gt; 4</a:t>
+              <a:t>(0; −1): −2 &lt; 5  →  không là nghiệm</a:t>
             </a:r>
           </a:p>
         </p:txBody>
@@ -10183,7 +10644,7 @@
         <p:spPr>
           <a:xfrm>
             <a:off x="731520" y="3346704"/>
-            <a:ext cx="6400800" cy="685800"/>
+            <a:ext cx="8686800" cy="1143000"/>
           </a:xfrm>
           <a:prstGeom prst="roundRect">
             <a:avLst>
@@ -10231,7 +10692,7 @@
         <p:spPr>
           <a:xfrm>
             <a:off x="914400" y="3346704"/>
-            <a:ext cx="6035040" cy="685800"/>
+            <a:ext cx="8321040" cy="1143000"/>
           </a:xfrm>
           <a:prstGeom prst="rect">
             <a:avLst/>
@@ -10256,35 +10717,152 @@
                 </a:solidFill>
                 <a:latin typeface="Calibri"/>
               </a:rPr>
-              <a:t>Cùng nửa mặt phẳng ⇒ cùng dấu</a:t>
-            </a:r>
-          </a:p>
-        </p:txBody>
-      </p:sp>
-      <p:pic>
-        <p:nvPicPr>
-          <p:cNvPr id="9" name="Picture 8" descr="rId11.png"/>
-          <p:cNvPicPr>
-            <a:picLocks noChangeAspect="1"/>
-          </p:cNvPicPr>
-          <p:nvPr/>
-        </p:nvPicPr>
-        <p:blipFill>
-          <a:blip r:embed="rId2"/>
-          <a:stretch>
-            <a:fillRect/>
-          </a:stretch>
-        </p:blipFill>
-        <p:spPr>
-          <a:xfrm>
-            <a:off x="7406640" y="1601545"/>
-            <a:ext cx="4389120" cy="4432150"/>
-          </a:xfrm>
-          <a:prstGeom prst="rect">
-            <a:avLst/>
-          </a:prstGeom>
-        </p:spPr>
-      </p:pic>
+              <a:t>(x</a:t>
+            </a:r>
+            <a:r>
+              <a:rPr sz="2400" b="1" baseline="-25000">
+                <a:solidFill>
+                  <a:srgbClr val="991B1B"/>
+                </a:solidFill>
+                <a:latin typeface="Calibri"/>
+              </a:rPr>
+              <a:t>0</a:t>
+            </a:r>
+            <a:r>
+              <a:rPr sz="2400" b="1">
+                <a:solidFill>
+                  <a:srgbClr val="991B1B"/>
+                </a:solidFill>
+                <a:latin typeface="Calibri"/>
+              </a:rPr>
+              <a:t>; y</a:t>
+            </a:r>
+            <a:r>
+              <a:rPr sz="2400" b="1" baseline="-25000">
+                <a:solidFill>
+                  <a:srgbClr val="991B1B"/>
+                </a:solidFill>
+                <a:latin typeface="Calibri"/>
+              </a:rPr>
+              <a:t>0</a:t>
+            </a:r>
+            <a:r>
+              <a:rPr sz="2400" b="1">
+                <a:solidFill>
+                  <a:srgbClr val="991B1B"/>
+                </a:solidFill>
+                <a:latin typeface="Calibri"/>
+              </a:rPr>
+              <a:t>) là nghiệm nếu ax</a:t>
+            </a:r>
+            <a:r>
+              <a:rPr sz="2400" b="1" baseline="-25000">
+                <a:solidFill>
+                  <a:srgbClr val="991B1B"/>
+                </a:solidFill>
+                <a:latin typeface="Calibri"/>
+              </a:rPr>
+              <a:t>0</a:t>
+            </a:r>
+            <a:r>
+              <a:rPr sz="2400" b="1">
+                <a:solidFill>
+                  <a:srgbClr val="991B1B"/>
+                </a:solidFill>
+                <a:latin typeface="Calibri"/>
+              </a:rPr>
+              <a:t> + by</a:t>
+            </a:r>
+            <a:r>
+              <a:rPr sz="2400" b="1" baseline="-25000">
+                <a:solidFill>
+                  <a:srgbClr val="991B1B"/>
+                </a:solidFill>
+                <a:latin typeface="Calibri"/>
+              </a:rPr>
+              <a:t>0</a:t>
+            </a:r>
+            <a:r>
+              <a:rPr sz="2400" b="1">
+                <a:solidFill>
+                  <a:srgbClr val="991B1B"/>
+                </a:solidFill>
+                <a:latin typeface="Calibri"/>
+              </a:rPr>
+              <a:t> ≤ c đúng</a:t>
+            </a:r>
+          </a:p>
+          <a:p>
+            <a:pPr algn="l">
+              <a:spcAft>
+                <a:spcPts val="400"/>
+              </a:spcAft>
+            </a:pPr>
+            <a:r>
+              <a:rPr sz="2400" b="1">
+                <a:solidFill>
+                  <a:srgbClr val="991B1B"/>
+                </a:solidFill>
+                <a:latin typeface="Calibri"/>
+              </a:rPr>
+              <a:t>Luôn có vô số nghiệm</a:t>
+            </a:r>
+          </a:p>
+        </p:txBody>
+      </p:sp>
+      <p:sp>
+        <p:nvSpPr>
+          <p:cNvPr id="9" name="Rounded Rectangle 8"/>
+          <p:cNvSpPr/>
+          <p:nvPr/>
+        </p:nvSpPr>
+        <p:spPr>
+          <a:xfrm>
+            <a:off x="10463479" y="457200"/>
+            <a:ext cx="1179576" cy="457200"/>
+          </a:xfrm>
+          <a:prstGeom prst="roundRect">
+            <a:avLst/>
+          </a:prstGeom>
+          <a:solidFill>
+            <a:srgbClr val="166534"/>
+          </a:solidFill>
+          <a:ln>
+            <a:noFill/>
+          </a:ln>
+          <a:effectLst/>
+        </p:spPr>
+        <p:style>
+          <a:lnRef idx="1">
+            <a:schemeClr val="accent1"/>
+          </a:lnRef>
+          <a:fillRef idx="3">
+            <a:schemeClr val="accent1"/>
+          </a:fillRef>
+          <a:effectRef idx="2">
+            <a:schemeClr val="accent1"/>
+          </a:effectRef>
+          <a:fontRef idx="minor">
+            <a:schemeClr val="lt1"/>
+          </a:fontRef>
+        </p:style>
+        <p:txBody>
+          <a:bodyPr rtlCol="0" anchor="ctr" tIns="0" bIns="0"/>
+          <a:lstStyle/>
+          <a:p>
+            <a:pPr algn="ctr"/>
+            <a:r>
+              <a:rPr sz="1400" b="1">
+                <a:solidFill>
+                  <a:srgbClr val="FFFFFF"/>
+                </a:solidFill>
+                <a:latin typeface="Arial"/>
+              </a:rPr>
+              <a:t>LỜI GIẢI</a:t>
+            </a:r>
+          </a:p>
+        </p:txBody>
+      </p:sp>
     </p:spTree>
   </p:cSld>
   <p:clrMapOvr>
@@ -10384,7 +10962,7 @@
                 </a:solidFill>
                 <a:latin typeface="Arial"/>
               </a:rPr>
-              <a:t>2. CÁC BƯỚC BIỂU DIỄN MIỀN NGHIỆM</a:t>
+              <a:t>ĐƯỜNG THẲNG CHIA ĐÔI MẶT PHẲNG</a:t>
             </a:r>
           </a:p>
         </p:txBody>
@@ -10463,7 +11041,7 @@
                 </a:solidFill>
                 <a:latin typeface="Calibri"/>
               </a:rPr>
-              <a:t>Toán 10 · Bài 3. Bất phương trình bậc nhất hai ẩn          8</a:t>
+              <a:t>Toán 10 · Bài 3. Bất phương trình bậc nhất hai ẩn          7</a:t>
             </a:r>
           </a:p>
         </p:txBody>
@@ -10477,7 +11055,7 @@
         <p:spPr>
           <a:xfrm>
             <a:off x="731520" y="1508760"/>
-            <a:ext cx="10789920" cy="2267712"/>
+            <a:ext cx="6400800" cy="1700784"/>
           </a:xfrm>
           <a:prstGeom prst="rect">
             <a:avLst/>
@@ -10489,6 +11067,22 @@
             <a:spAutoFit/>
           </a:bodyPr>
           <a:lstStyle/>
+          <a:p>
+            <a:pPr algn="l">
+              <a:spcAft>
+                <a:spcPts val="1000"/>
+              </a:spcAft>
+            </a:pPr>
+            <a:r>
+              <a:rPr sz="2400" b="1">
+                <a:solidFill>
+                  <a:srgbClr val="1E40AF"/>
+                </a:solidFill>
+                <a:latin typeface="Calibri"/>
+              </a:rPr>
+              <a:t>d: 2x − y = 4</a:t>
+            </a:r>
+          </a:p>
           <a:p>
             <a:pPr algn="l" marL="365760" indent="-365760">
               <a:spcAft>
@@ -10507,7 +11101,7 @@
                 </a:solidFill>
                 <a:latin typeface="Calibri"/>
               </a:rPr>
-              <a:t>B1. Vẽ đường thẳng d: ax + by = c</a:t>
+              <a:t>O, A, B:  2x − y &lt; 4</a:t>
             </a:r>
           </a:p>
           <a:p>
@@ -10528,148 +11122,7 @@
                 </a:solidFill>
                 <a:latin typeface="Calibri"/>
               </a:rPr>
-              <a:t>B2. Lấy M</a:t>
-            </a:r>
-            <a:r>
-              <a:rPr sz="2400" baseline="-25000">
-                <a:solidFill>
-                  <a:srgbClr val="1E293B"/>
-                </a:solidFill>
-                <a:latin typeface="Calibri"/>
-              </a:rPr>
-              <a:t>0</a:t>
-            </a:r>
-            <a:r>
-              <a:rPr sz="2400">
-                <a:solidFill>
-                  <a:srgbClr val="1E293B"/>
-                </a:solidFill>
-                <a:latin typeface="Calibri"/>
-              </a:rPr>
-              <a:t>(x</a:t>
-            </a:r>
-            <a:r>
-              <a:rPr sz="2400" baseline="-25000">
-                <a:solidFill>
-                  <a:srgbClr val="1E293B"/>
-                </a:solidFill>
-                <a:latin typeface="Calibri"/>
-              </a:rPr>
-              <a:t>0</a:t>
-            </a:r>
-            <a:r>
-              <a:rPr sz="2400">
-                <a:solidFill>
-                  <a:srgbClr val="1E293B"/>
-                </a:solidFill>
-                <a:latin typeface="Calibri"/>
-              </a:rPr>
-              <a:t>; y</a:t>
-            </a:r>
-            <a:r>
-              <a:rPr sz="2400" baseline="-25000">
-                <a:solidFill>
-                  <a:srgbClr val="1E293B"/>
-                </a:solidFill>
-                <a:latin typeface="Calibri"/>
-              </a:rPr>
-              <a:t>0</a:t>
-            </a:r>
-            <a:r>
-              <a:rPr sz="2400">
-                <a:solidFill>
-                  <a:srgbClr val="1E293B"/>
-                </a:solidFill>
-                <a:latin typeface="Calibri"/>
-              </a:rPr>
-              <a:t>) không thuộc d</a:t>
-            </a:r>
-          </a:p>
-          <a:p>
-            <a:pPr algn="l" marL="365760" indent="-365760">
-              <a:spcAft>
-                <a:spcPts val="1000"/>
-              </a:spcAft>
-              <a:buClr>
-                <a:srgbClr val="1E40AF"/>
-              </a:buClr>
-              <a:buFont typeface="Arial"/>
-              <a:buChar char="•"/>
-            </a:pPr>
-            <a:r>
-              <a:rPr sz="2400">
-                <a:solidFill>
-                  <a:srgbClr val="1E293B"/>
-                </a:solidFill>
-                <a:latin typeface="Calibri"/>
-              </a:rPr>
-              <a:t>B3. Tính ax</a:t>
-            </a:r>
-            <a:r>
-              <a:rPr sz="2400" baseline="-25000">
-                <a:solidFill>
-                  <a:srgbClr val="1E293B"/>
-                </a:solidFill>
-                <a:latin typeface="Calibri"/>
-              </a:rPr>
-              <a:t>0</a:t>
-            </a:r>
-            <a:r>
-              <a:rPr sz="2400">
-                <a:solidFill>
-                  <a:srgbClr val="1E293B"/>
-                </a:solidFill>
-                <a:latin typeface="Calibri"/>
-              </a:rPr>
-              <a:t> + by</a:t>
-            </a:r>
-            <a:r>
-              <a:rPr sz="2400" baseline="-25000">
-                <a:solidFill>
-                  <a:srgbClr val="1E293B"/>
-                </a:solidFill>
-                <a:latin typeface="Calibri"/>
-              </a:rPr>
-              <a:t>0</a:t>
-            </a:r>
-            <a:r>
-              <a:rPr sz="2400">
-                <a:solidFill>
-                  <a:srgbClr val="1E293B"/>
-                </a:solidFill>
-                <a:latin typeface="Calibri"/>
-              </a:rPr>
-              <a:t>, so sánh với c</a:t>
-            </a:r>
-          </a:p>
-          <a:p>
-            <a:pPr algn="l" marL="365760" indent="-365760">
-              <a:spcAft>
-                <a:spcPts val="1000"/>
-              </a:spcAft>
-              <a:buClr>
-                <a:srgbClr val="1E40AF"/>
-              </a:buClr>
-              <a:buFont typeface="Arial"/>
-              <a:buChar char="•"/>
-            </a:pPr>
-            <a:r>
-              <a:rPr sz="2400">
-                <a:solidFill>
-                  <a:srgbClr val="1E293B"/>
-                </a:solidFill>
-                <a:latin typeface="Calibri"/>
-              </a:rPr>
-              <a:t>Thỏa mãn: giữ nửa chứa M</a:t>
-            </a:r>
-            <a:r>
-              <a:rPr sz="2400" baseline="-25000">
-                <a:solidFill>
-                  <a:srgbClr val="1E293B"/>
-                </a:solidFill>
-                <a:latin typeface="Calibri"/>
-              </a:rPr>
-              <a:t>0</a:t>
+              <a:t>C, D:  2x − y &gt; 4</a:t>
             </a:r>
           </a:p>
         </p:txBody>
@@ -10682,8 +11135,8 @@
         </p:nvSpPr>
         <p:spPr>
           <a:xfrm>
-            <a:off x="731520" y="3913632"/>
-            <a:ext cx="8686800" cy="1143000"/>
+            <a:off x="731520" y="3346704"/>
+            <a:ext cx="6400800" cy="685800"/>
           </a:xfrm>
           <a:prstGeom prst="roundRect">
             <a:avLst>
@@ -10730,8 +11183,8 @@
         </p:nvSpPr>
         <p:spPr>
           <a:xfrm>
-            <a:off x="914400" y="3913632"/>
-            <a:ext cx="8321040" cy="1143000"/>
+            <a:off x="914400" y="3346704"/>
+            <a:ext cx="6035040" cy="685800"/>
           </a:xfrm>
           <a:prstGeom prst="rect">
             <a:avLst/>
@@ -10756,45 +11209,35 @@
                 </a:solidFill>
                 <a:latin typeface="Calibri"/>
               </a:rPr>
-              <a:t>c ≠ 0: chọn M</a:t>
-            </a:r>
-            <a:r>
-              <a:rPr sz="2400" b="1" baseline="-25000">
-                <a:solidFill>
-                  <a:srgbClr val="991B1B"/>
-                </a:solidFill>
-                <a:latin typeface="Calibri"/>
-              </a:rPr>
-              <a:t>0</a:t>
-            </a:r>
-            <a:r>
-              <a:rPr sz="2400" b="1">
-                <a:solidFill>
-                  <a:srgbClr val="991B1B"/>
-                </a:solidFill>
-                <a:latin typeface="Calibri"/>
-              </a:rPr>
-              <a:t> là gốc O</a:t>
-            </a:r>
-          </a:p>
-          <a:p>
-            <a:pPr algn="l">
-              <a:spcAft>
-                <a:spcPts val="400"/>
-              </a:spcAft>
-            </a:pPr>
-            <a:r>
-              <a:rPr sz="2400" b="1">
-                <a:solidFill>
-                  <a:srgbClr val="991B1B"/>
-                </a:solidFill>
-                <a:latin typeface="Calibri"/>
-              </a:rPr>
-              <a:t>c = 0: chọn (1; 0) hoặc (0; 1)</a:t>
-            </a:r>
-          </a:p>
-        </p:txBody>
-      </p:sp>
+              <a:t>Cùng nửa mặt phẳng ⇒ cùng dấu</a:t>
+            </a:r>
+          </a:p>
+        </p:txBody>
+      </p:sp>
+      <p:pic>
+        <p:nvPicPr>
+          <p:cNvPr id="9" name="Picture 8" descr="rId11.png"/>
+          <p:cNvPicPr>
+            <a:picLocks noChangeAspect="1"/>
+          </p:cNvPicPr>
+          <p:nvPr/>
+        </p:nvPicPr>
+        <p:blipFill>
+          <a:blip r:embed="rId2"/>
+          <a:stretch>
+            <a:fillRect/>
+          </a:stretch>
+        </p:blipFill>
+        <p:spPr>
+          <a:xfrm>
+            <a:off x="7406640" y="1601545"/>
+            <a:ext cx="4389120" cy="4432150"/>
+          </a:xfrm>
+          <a:prstGeom prst="rect">
+            <a:avLst/>
+          </a:prstGeom>
+        </p:spPr>
+      </p:pic>
     </p:spTree>
   </p:cSld>
   <p:clrMapOvr>
@@ -10894,7 +11337,7 @@
                 </a:solidFill>
                 <a:latin typeface="Arial"/>
               </a:rPr>
-              <a:t>VÍ DỤ 3</a:t>
+              <a:t>2. CÁC BƯỚC BIỂU DIỄN MIỀN NGHIỆM</a:t>
             </a:r>
           </a:p>
         </p:txBody>
@@ -10973,7 +11416,7 @@
                 </a:solidFill>
                 <a:latin typeface="Calibri"/>
               </a:rPr>
-              <a:t>Toán 10 · Bài 3. Bất phương trình bậc nhất hai ẩn          9</a:t>
+              <a:t>Toán 10 · Bài 3. Bất phương trình bậc nhất hai ẩn          8</a:t>
             </a:r>
           </a:p>
         </p:txBody>
@@ -10987,7 +11430,7 @@
         <p:spPr>
           <a:xfrm>
             <a:off x="731520" y="1508760"/>
-            <a:ext cx="10789920" cy="1700784"/>
+            <a:ext cx="10789920" cy="2267712"/>
           </a:xfrm>
           <a:prstGeom prst="rect">
             <a:avLst/>
@@ -11017,7 +11460,7 @@
                 </a:solidFill>
                 <a:latin typeface="Calibri"/>
               </a:rPr>
-              <a:t>Biểu diễn miền nghiệm:</a:t>
+              <a:t>B1. Vẽ đường thẳng d: ax + by = c</a:t>
             </a:r>
           </a:p>
           <a:p>
@@ -11038,23 +11481,269 @@
                 </a:solidFill>
                 <a:latin typeface="Calibri"/>
               </a:rPr>
-              <a:t>x + y ≥ 100</a:t>
-            </a:r>
-          </a:p>
-          <a:p>
-            <a:pPr algn="l">
+              <a:t>B2. Lấy M</a:t>
+            </a:r>
+            <a:r>
+              <a:rPr sz="2400" baseline="-25000">
+                <a:solidFill>
+                  <a:srgbClr val="1E293B"/>
+                </a:solidFill>
+                <a:latin typeface="Calibri"/>
+              </a:rPr>
+              <a:t>0</a:t>
+            </a:r>
+            <a:r>
+              <a:rPr sz="2400">
+                <a:solidFill>
+                  <a:srgbClr val="1E293B"/>
+                </a:solidFill>
+                <a:latin typeface="Calibri"/>
+              </a:rPr>
+              <a:t>(x</a:t>
+            </a:r>
+            <a:r>
+              <a:rPr sz="2400" baseline="-25000">
+                <a:solidFill>
+                  <a:srgbClr val="1E293B"/>
+                </a:solidFill>
+                <a:latin typeface="Calibri"/>
+              </a:rPr>
+              <a:t>0</a:t>
+            </a:r>
+            <a:r>
+              <a:rPr sz="2400">
+                <a:solidFill>
+                  <a:srgbClr val="1E293B"/>
+                </a:solidFill>
+                <a:latin typeface="Calibri"/>
+              </a:rPr>
+              <a:t>; y</a:t>
+            </a:r>
+            <a:r>
+              <a:rPr sz="2400" baseline="-25000">
+                <a:solidFill>
+                  <a:srgbClr val="1E293B"/>
+                </a:solidFill>
+                <a:latin typeface="Calibri"/>
+              </a:rPr>
+              <a:t>0</a:t>
+            </a:r>
+            <a:r>
+              <a:rPr sz="2400">
+                <a:solidFill>
+                  <a:srgbClr val="1E293B"/>
+                </a:solidFill>
+                <a:latin typeface="Calibri"/>
+              </a:rPr>
+              <a:t>) không thuộc d</a:t>
+            </a:r>
+          </a:p>
+          <a:p>
+            <a:pPr algn="l" marL="365760" indent="-365760">
               <a:spcAft>
                 <a:spcPts val="1000"/>
               </a:spcAft>
+              <a:buClr>
+                <a:srgbClr val="1E40AF"/>
+              </a:buClr>
+              <a:buFont typeface="Arial"/>
+              <a:buChar char="•"/>
             </a:pPr>
             <a:r>
+              <a:rPr sz="2400">
+                <a:solidFill>
+                  <a:srgbClr val="1E293B"/>
+                </a:solidFill>
+                <a:latin typeface="Calibri"/>
+              </a:rPr>
+              <a:t>B3. Tính ax</a:t>
+            </a:r>
+            <a:r>
+              <a:rPr sz="2400" baseline="-25000">
+                <a:solidFill>
+                  <a:srgbClr val="1E293B"/>
+                </a:solidFill>
+                <a:latin typeface="Calibri"/>
+              </a:rPr>
+              <a:t>0</a:t>
+            </a:r>
+            <a:r>
+              <a:rPr sz="2400">
+                <a:solidFill>
+                  <a:srgbClr val="1E293B"/>
+                </a:solidFill>
+                <a:latin typeface="Calibri"/>
+              </a:rPr>
+              <a:t> + by</a:t>
+            </a:r>
+            <a:r>
+              <a:rPr sz="2400" baseline="-25000">
+                <a:solidFill>
+                  <a:srgbClr val="1E293B"/>
+                </a:solidFill>
+                <a:latin typeface="Calibri"/>
+              </a:rPr>
+              <a:t>0</a:t>
+            </a:r>
+            <a:r>
+              <a:rPr sz="2400">
+                <a:solidFill>
+                  <a:srgbClr val="1E293B"/>
+                </a:solidFill>
+                <a:latin typeface="Calibri"/>
+              </a:rPr>
+              <a:t>, so sánh với c</a:t>
+            </a:r>
+          </a:p>
+          <a:p>
+            <a:pPr algn="l" marL="365760" indent="-365760">
+              <a:spcAft>
+                <a:spcPts val="1000"/>
+              </a:spcAft>
+              <a:buClr>
+                <a:srgbClr val="1E40AF"/>
+              </a:buClr>
+              <a:buFont typeface="Arial"/>
+              <a:buChar char="•"/>
+            </a:pPr>
+            <a:r>
+              <a:rPr sz="2400">
+                <a:solidFill>
+                  <a:srgbClr val="1E293B"/>
+                </a:solidFill>
+                <a:latin typeface="Calibri"/>
+              </a:rPr>
+              <a:t>Thỏa mãn: giữ nửa chứa M</a:t>
+            </a:r>
+            <a:r>
+              <a:rPr sz="2400" baseline="-25000">
+                <a:solidFill>
+                  <a:srgbClr val="1E293B"/>
+                </a:solidFill>
+                <a:latin typeface="Calibri"/>
+              </a:rPr>
+              <a:t>0</a:t>
+            </a:r>
+          </a:p>
+        </p:txBody>
+      </p:sp>
+      <p:sp>
+        <p:nvSpPr>
+          <p:cNvPr id="7" name="Rounded Rectangle 6"/>
+          <p:cNvSpPr/>
+          <p:nvPr/>
+        </p:nvSpPr>
+        <p:spPr>
+          <a:xfrm>
+            <a:off x="731520" y="3913632"/>
+            <a:ext cx="8686800" cy="1143000"/>
+          </a:xfrm>
+          <a:prstGeom prst="roundRect">
+            <a:avLst>
+              <a:gd name="adj" fmla="val 8000"/>
+            </a:avLst>
+          </a:prstGeom>
+          <a:solidFill>
+            <a:srgbClr val="FEF2F2"/>
+          </a:solidFill>
+          <a:ln w="19050">
+            <a:solidFill>
+              <a:srgbClr val="991B1B"/>
+            </a:solidFill>
+          </a:ln>
+          <a:effectLst/>
+        </p:spPr>
+        <p:style>
+          <a:lnRef idx="1">
+            <a:schemeClr val="accent1"/>
+          </a:lnRef>
+          <a:fillRef idx="3">
+            <a:schemeClr val="accent1"/>
+          </a:fillRef>
+          <a:effectRef idx="2">
+            <a:schemeClr val="accent1"/>
+          </a:effectRef>
+          <a:fontRef idx="minor">
+            <a:schemeClr val="lt1"/>
+          </a:fontRef>
+        </p:style>
+        <p:txBody>
+          <a:bodyPr rtlCol="0" anchor="ctr"/>
+          <a:lstStyle/>
+          <a:p>
+            <a:pPr algn="ctr"/>
+          </a:p>
+        </p:txBody>
+      </p:sp>
+      <p:sp>
+        <p:nvSpPr>
+          <p:cNvPr id="8" name="TextBox 7"/>
+          <p:cNvSpPr txBox="1"/>
+          <p:nvPr/>
+        </p:nvSpPr>
+        <p:spPr>
+          <a:xfrm>
+            <a:off x="914400" y="3913632"/>
+            <a:ext cx="8321040" cy="1143000"/>
+          </a:xfrm>
+          <a:prstGeom prst="rect">
+            <a:avLst/>
+          </a:prstGeom>
+          <a:noFill/>
+        </p:spPr>
+        <p:txBody>
+          <a:bodyPr wrap="square" anchor="ctr">
+            <a:spAutoFit/>
+          </a:bodyPr>
+          <a:lstStyle/>
+          <a:p>
+            <a:pPr algn="l">
+              <a:spcAft>
+                <a:spcPts val="400"/>
+              </a:spcAft>
+            </a:pPr>
+            <a:r>
               <a:rPr sz="2400" b="1">
                 <a:solidFill>
-                  <a:srgbClr val="1E40AF"/>
-                </a:solidFill>
-                <a:latin typeface="Calibri"/>
-              </a:rPr>
-              <a:t>Gợi mở: Chọn điểm thử nào?</a:t>
+                  <a:srgbClr val="991B1B"/>
+                </a:solidFill>
+                <a:latin typeface="Calibri"/>
+              </a:rPr>
+              <a:t>c ≠ 0: chọn M</a:t>
+            </a:r>
+            <a:r>
+              <a:rPr sz="2400" b="1" baseline="-25000">
+                <a:solidFill>
+                  <a:srgbClr val="991B1B"/>
+                </a:solidFill>
+                <a:latin typeface="Calibri"/>
+              </a:rPr>
+              <a:t>0</a:t>
+            </a:r>
+            <a:r>
+              <a:rPr sz="2400" b="1">
+                <a:solidFill>
+                  <a:srgbClr val="991B1B"/>
+                </a:solidFill>
+                <a:latin typeface="Calibri"/>
+              </a:rPr>
+              <a:t> là gốc O</a:t>
+            </a:r>
+          </a:p>
+          <a:p>
+            <a:pPr algn="l">
+              <a:spcAft>
+                <a:spcPts val="400"/>
+              </a:spcAft>
+            </a:pPr>
+            <a:r>
+              <a:rPr sz="2400" b="1">
+                <a:solidFill>
+                  <a:srgbClr val="991B1B"/>
+                </a:solidFill>
+                <a:latin typeface="Calibri"/>
+              </a:rPr>
+              <a:t>c = 0: chọn (1; 0) hoặc (0; 1)</a:t>
             </a:r>
           </a:p>
         </p:txBody>
@@ -11138,7 +11827,7 @@
         <p:spPr>
           <a:xfrm>
             <a:off x="731520" y="274320"/>
-            <a:ext cx="10972800" cy="868680"/>
+            <a:ext cx="9848088" cy="868680"/>
           </a:xfrm>
           <a:prstGeom prst="rect">
             <a:avLst/>
@@ -11158,7 +11847,7 @@
                 </a:solidFill>
                 <a:latin typeface="Arial"/>
               </a:rPr>
-              <a:t>VÍ DỤ 4</a:t>
+              <a:t>VÍ DỤ 3</a:t>
             </a:r>
           </a:p>
         </p:txBody>
@@ -11237,7 +11926,7 @@
                 </a:solidFill>
                 <a:latin typeface="Calibri"/>
               </a:rPr>
-              <a:t>Toán 10 · Bài 3. Bất phương trình bậc nhất hai ẩn          11</a:t>
+              <a:t>Toán 10 · Bài 3. Bất phương trình bậc nhất hai ẩn          9</a:t>
             </a:r>
           </a:p>
         </p:txBody>
@@ -11302,7 +11991,7 @@
                 </a:solidFill>
                 <a:latin typeface="Calibri"/>
               </a:rPr>
-              <a:t>5x − 7y ≤ 0</a:t>
+              <a:t>x + y ≥ 100</a:t>
             </a:r>
           </a:p>
           <a:p>
@@ -11318,7 +12007,60 @@
                 </a:solidFill>
                 <a:latin typeface="Calibri"/>
               </a:rPr>
-              <a:t>Gợi mở: O có nằm trên d không?</a:t>
+              <a:t>Gợi mở: Chọn điểm thử nào?</a:t>
+            </a:r>
+          </a:p>
+        </p:txBody>
+      </p:sp>
+      <p:sp>
+        <p:nvSpPr>
+          <p:cNvPr id="7" name="Rounded Rectangle 6"/>
+          <p:cNvSpPr/>
+          <p:nvPr/>
+        </p:nvSpPr>
+        <p:spPr>
+          <a:xfrm>
+            <a:off x="10701223" y="457200"/>
+            <a:ext cx="941832" cy="457200"/>
+          </a:xfrm>
+          <a:prstGeom prst="roundRect">
+            <a:avLst/>
+          </a:prstGeom>
+          <a:solidFill>
+            <a:srgbClr val="1E40AF"/>
+          </a:solidFill>
+          <a:ln>
+            <a:noFill/>
+          </a:ln>
+          <a:effectLst/>
+        </p:spPr>
+        <p:style>
+          <a:lnRef idx="1">
+            <a:schemeClr val="accent1"/>
+          </a:lnRef>
+          <a:fillRef idx="3">
+            <a:schemeClr val="accent1"/>
+          </a:fillRef>
+          <a:effectRef idx="2">
+            <a:schemeClr val="accent1"/>
+          </a:effectRef>
+          <a:fontRef idx="minor">
+            <a:schemeClr val="lt1"/>
+          </a:fontRef>
+        </p:style>
+        <p:txBody>
+          <a:bodyPr rtlCol="0" anchor="ctr" tIns="0" bIns="0"/>
+          <a:lstStyle/>
+          <a:p>
+            <a:pPr algn="ctr"/>
+            <a:r>
+              <a:rPr sz="1400" b="1">
+                <a:solidFill>
+                  <a:srgbClr val="FFFFFF"/>
+                </a:solidFill>
+                <a:latin typeface="Arial"/>
+              </a:rPr>
+              <a:t>ĐỀ BÀI</a:t>
             </a:r>
           </a:p>
         </p:txBody>
